--- a/Мукаева_Дипломная работа.pptx
+++ b/Мукаева_Дипломная работа.pptx
@@ -5,24 +5,22 @@
     <p:sldMasterId id="2147483680" r:id="rId1"/>
     <p:sldMasterId id="2147483681" r:id="rId2"/>
     <p:sldMasterId id="2147483682" r:id="rId3"/>
-    <p:sldMasterId id="2147483683" r:id="rId4"/>
   </p:sldMasterIdLst>
   <p:notesMasterIdLst>
-    <p:notesMasterId r:id="rId17"/>
+    <p:notesMasterId r:id="rId15"/>
   </p:notesMasterIdLst>
   <p:sldIdLst>
-    <p:sldId id="256" r:id="rId5"/>
-    <p:sldId id="258" r:id="rId6"/>
-    <p:sldId id="260" r:id="rId7"/>
-    <p:sldId id="273" r:id="rId8"/>
-    <p:sldId id="262" r:id="rId9"/>
-    <p:sldId id="264" r:id="rId10"/>
-    <p:sldId id="266" r:id="rId11"/>
-    <p:sldId id="274" r:id="rId12"/>
-    <p:sldId id="275" r:id="rId13"/>
-    <p:sldId id="268" r:id="rId14"/>
-    <p:sldId id="276" r:id="rId15"/>
-    <p:sldId id="271" r:id="rId16"/>
+    <p:sldId id="256" r:id="rId4"/>
+    <p:sldId id="260" r:id="rId5"/>
+    <p:sldId id="273" r:id="rId6"/>
+    <p:sldId id="262" r:id="rId7"/>
+    <p:sldId id="264" r:id="rId8"/>
+    <p:sldId id="266" r:id="rId9"/>
+    <p:sldId id="277" r:id="rId10"/>
+    <p:sldId id="278" r:id="rId11"/>
+    <p:sldId id="268" r:id="rId12"/>
+    <p:sldId id="276" r:id="rId13"/>
+    <p:sldId id="271" r:id="rId14"/>
   </p:sldIdLst>
   <p:sldSz cx="9144000" cy="5143500" type="screen16x9"/>
   <p:notesSz cx="6858000" cy="9144000"/>
@@ -1070,110 +1068,6 @@
         </p:txBody>
       </p:sp>
     </p:spTree>
-  </p:cSld>
-  <p:clrMapOvr>
-    <a:masterClrMapping/>
-  </p:clrMapOvr>
-</p:notes>
-</file>
-
-<file path=ppt/notesSlides/notesSlide11.xml><?xml version="1.0" encoding="utf-8"?>
-<p:notes xmlns:a="http://schemas.openxmlformats.org/drawingml/2006/main" xmlns:r="http://schemas.openxmlformats.org/officeDocument/2006/relationships" xmlns:p="http://schemas.openxmlformats.org/presentationml/2006/main" showMasterSp="0" showMasterPhAnim="0">
-  <p:cSld>
-    <p:spTree>
-      <p:nvGrpSpPr>
-        <p:cNvPr id="1" name="Shape 307"/>
-        <p:cNvGrpSpPr/>
-        <p:nvPr/>
-      </p:nvGrpSpPr>
-      <p:grpSpPr>
-        <a:xfrm>
-          <a:off x="0" y="0"/>
-          <a:ext cx="0" cy="0"/>
-          <a:chOff x="0" y="0"/>
-          <a:chExt cx="0" cy="0"/>
-        </a:xfrm>
-      </p:grpSpPr>
-      <p:sp>
-        <p:nvSpPr>
-          <p:cNvPr id="308" name="Google Shape;308;g1874089cc04_0_7:notes"/>
-          <p:cNvSpPr>
-            <a:spLocks noGrp="1" noRot="1" noChangeAspect="1"/>
-          </p:cNvSpPr>
-          <p:nvPr>
-            <p:ph type="sldImg" idx="2"/>
-          </p:nvPr>
-        </p:nvSpPr>
-        <p:spPr>
-          <a:xfrm>
-            <a:off x="381000" y="685800"/>
-            <a:ext cx="6096000" cy="3429000"/>
-          </a:xfrm>
-          <a:custGeom>
-            <a:avLst/>
-            <a:gdLst/>
-            <a:ahLst/>
-            <a:cxnLst/>
-            <a:rect l="l" t="t" r="r" b="b"/>
-            <a:pathLst>
-              <a:path w="120000" h="120000" extrusionOk="0">
-                <a:moveTo>
-                  <a:pt x="0" y="0"/>
-                </a:moveTo>
-                <a:lnTo>
-                  <a:pt x="120000" y="0"/>
-                </a:lnTo>
-                <a:lnTo>
-                  <a:pt x="120000" y="120000"/>
-                </a:lnTo>
-                <a:lnTo>
-                  <a:pt x="0" y="120000"/>
-                </a:lnTo>
-                <a:close/>
-              </a:path>
-            </a:pathLst>
-          </a:custGeom>
-        </p:spPr>
-      </p:sp>
-      <p:sp>
-        <p:nvSpPr>
-          <p:cNvPr id="309" name="Google Shape;309;g1874089cc04_0_7:notes"/>
-          <p:cNvSpPr txBox="1">
-            <a:spLocks noGrp="1"/>
-          </p:cNvSpPr>
-          <p:nvPr>
-            <p:ph type="body" idx="1"/>
-          </p:nvPr>
-        </p:nvSpPr>
-        <p:spPr>
-          <a:xfrm>
-            <a:off x="685800" y="4343400"/>
-            <a:ext cx="5486400" cy="4114800"/>
-          </a:xfrm>
-          <a:prstGeom prst="rect">
-            <a:avLst/>
-          </a:prstGeom>
-        </p:spPr>
-        <p:txBody>
-          <a:bodyPr spcFirstLastPara="1" wrap="square" lIns="91425" tIns="45700" rIns="91425" bIns="45700" anchor="t" anchorCtr="0">
-            <a:noAutofit/>
-          </a:bodyPr>
-          <a:lstStyle/>
-          <a:p>
-            <a:pPr marL="0" lvl="0" indent="0" algn="l" rtl="0">
-              <a:spcBef>
-                <a:spcPts val="0"/>
-              </a:spcBef>
-              <a:spcAft>
-                <a:spcPts val="0"/>
-              </a:spcAft>
-              <a:buNone/>
-            </a:pPr>
-            <a:endParaRPr/>
-          </a:p>
-        </p:txBody>
-      </p:sp>
-    </p:spTree>
     <p:extLst>
       <p:ext uri="{BB962C8B-B14F-4D97-AF65-F5344CB8AC3E}">
         <p14:creationId xmlns:p14="http://schemas.microsoft.com/office/powerpoint/2010/main" val="868595074"/>
@@ -1186,7 +1080,7 @@
 </p:notes>
 </file>
 
-<file path=ppt/notesSlides/notesSlide12.xml><?xml version="1.0" encoding="utf-8"?>
+<file path=ppt/notesSlides/notesSlide11.xml><?xml version="1.0" encoding="utf-8"?>
 <p:notes xmlns:a="http://schemas.openxmlformats.org/drawingml/2006/main" xmlns:r="http://schemas.openxmlformats.org/officeDocument/2006/relationships" xmlns:p="http://schemas.openxmlformats.org/presentationml/2006/main" showMasterSp="0" showMasterPhAnim="0">
   <p:cSld>
     <p:spTree>
@@ -1313,7 +1207,7 @@
   <p:cSld>
     <p:spTree>
       <p:nvGrpSpPr>
-        <p:cNvPr id="1" name="Shape 222"/>
+        <p:cNvPr id="1" name="Shape 255"/>
         <p:cNvGrpSpPr/>
         <p:nvPr/>
       </p:nvGrpSpPr>
@@ -1327,45 +1221,7 @@
       </p:grpSpPr>
       <p:sp>
         <p:nvSpPr>
-          <p:cNvPr id="223" name="Google Shape;223;g2a9e95685d1_2_9:notes"/>
-          <p:cNvSpPr txBox="1">
-            <a:spLocks noGrp="1"/>
-          </p:cNvSpPr>
-          <p:nvPr>
-            <p:ph type="body" idx="1"/>
-          </p:nvPr>
-        </p:nvSpPr>
-        <p:spPr>
-          <a:xfrm>
-            <a:off x="685800" y="4343400"/>
-            <a:ext cx="5486400" cy="4114800"/>
-          </a:xfrm>
-          <a:prstGeom prst="rect">
-            <a:avLst/>
-          </a:prstGeom>
-        </p:spPr>
-        <p:txBody>
-          <a:bodyPr spcFirstLastPara="1" wrap="square" lIns="91425" tIns="45700" rIns="91425" bIns="45700" anchor="t" anchorCtr="0">
-            <a:noAutofit/>
-          </a:bodyPr>
-          <a:lstStyle/>
-          <a:p>
-            <a:pPr marL="0" lvl="0" indent="0" algn="l" rtl="0">
-              <a:spcBef>
-                <a:spcPts val="0"/>
-              </a:spcBef>
-              <a:spcAft>
-                <a:spcPts val="0"/>
-              </a:spcAft>
-              <a:buNone/>
-            </a:pPr>
-            <a:endParaRPr/>
-          </a:p>
-        </p:txBody>
-      </p:sp>
-      <p:sp>
-        <p:nvSpPr>
-          <p:cNvPr id="224" name="Google Shape;224;g2a9e95685d1_2_9:notes"/>
+          <p:cNvPr id="256" name="Google Shape;256;g13a5e79da30_0_6:notes"/>
           <p:cNvSpPr>
             <a:spLocks noGrp="1" noRot="1" noChangeAspect="1"/>
           </p:cNvSpPr>
@@ -1375,8 +1231,8 @@
         </p:nvSpPr>
         <p:spPr>
           <a:xfrm>
-            <a:off x="382588" y="685800"/>
-            <a:ext cx="6094412" cy="3429000"/>
+            <a:off x="381000" y="685800"/>
+            <a:ext cx="6096000" cy="3429000"/>
           </a:xfrm>
           <a:custGeom>
             <a:avLst/>
@@ -1403,6 +1259,44 @@
             </a:pathLst>
           </a:custGeom>
         </p:spPr>
+      </p:sp>
+      <p:sp>
+        <p:nvSpPr>
+          <p:cNvPr id="257" name="Google Shape;257;g13a5e79da30_0_6:notes"/>
+          <p:cNvSpPr txBox="1">
+            <a:spLocks noGrp="1"/>
+          </p:cNvSpPr>
+          <p:nvPr>
+            <p:ph type="body" idx="1"/>
+          </p:nvPr>
+        </p:nvSpPr>
+        <p:spPr>
+          <a:xfrm>
+            <a:off x="685800" y="4343400"/>
+            <a:ext cx="5486400" cy="4114800"/>
+          </a:xfrm>
+          <a:prstGeom prst="rect">
+            <a:avLst/>
+          </a:prstGeom>
+        </p:spPr>
+        <p:txBody>
+          <a:bodyPr spcFirstLastPara="1" wrap="square" lIns="91425" tIns="45700" rIns="91425" bIns="45700" anchor="t" anchorCtr="0">
+            <a:noAutofit/>
+          </a:bodyPr>
+          <a:lstStyle/>
+          <a:p>
+            <a:pPr marL="0" lvl="0" indent="0" algn="l" rtl="0">
+              <a:spcBef>
+                <a:spcPts val="0"/>
+              </a:spcBef>
+              <a:spcAft>
+                <a:spcPts val="0"/>
+              </a:spcAft>
+              <a:buNone/>
+            </a:pPr>
+            <a:endParaRPr/>
+          </a:p>
+        </p:txBody>
       </p:sp>
     </p:spTree>
   </p:cSld>
@@ -1509,110 +1403,6 @@
         </p:txBody>
       </p:sp>
     </p:spTree>
-  </p:cSld>
-  <p:clrMapOvr>
-    <a:masterClrMapping/>
-  </p:clrMapOvr>
-</p:notes>
-</file>
-
-<file path=ppt/notesSlides/notesSlide4.xml><?xml version="1.0" encoding="utf-8"?>
-<p:notes xmlns:a="http://schemas.openxmlformats.org/drawingml/2006/main" xmlns:r="http://schemas.openxmlformats.org/officeDocument/2006/relationships" xmlns:p="http://schemas.openxmlformats.org/presentationml/2006/main" showMasterSp="0" showMasterPhAnim="0">
-  <p:cSld>
-    <p:spTree>
-      <p:nvGrpSpPr>
-        <p:cNvPr id="1" name="Shape 255"/>
-        <p:cNvGrpSpPr/>
-        <p:nvPr/>
-      </p:nvGrpSpPr>
-      <p:grpSpPr>
-        <a:xfrm>
-          <a:off x="0" y="0"/>
-          <a:ext cx="0" cy="0"/>
-          <a:chOff x="0" y="0"/>
-          <a:chExt cx="0" cy="0"/>
-        </a:xfrm>
-      </p:grpSpPr>
-      <p:sp>
-        <p:nvSpPr>
-          <p:cNvPr id="256" name="Google Shape;256;g13a5e79da30_0_6:notes"/>
-          <p:cNvSpPr>
-            <a:spLocks noGrp="1" noRot="1" noChangeAspect="1"/>
-          </p:cNvSpPr>
-          <p:nvPr>
-            <p:ph type="sldImg" idx="2"/>
-          </p:nvPr>
-        </p:nvSpPr>
-        <p:spPr>
-          <a:xfrm>
-            <a:off x="381000" y="685800"/>
-            <a:ext cx="6096000" cy="3429000"/>
-          </a:xfrm>
-          <a:custGeom>
-            <a:avLst/>
-            <a:gdLst/>
-            <a:ahLst/>
-            <a:cxnLst/>
-            <a:rect l="l" t="t" r="r" b="b"/>
-            <a:pathLst>
-              <a:path w="120000" h="120000" extrusionOk="0">
-                <a:moveTo>
-                  <a:pt x="0" y="0"/>
-                </a:moveTo>
-                <a:lnTo>
-                  <a:pt x="120000" y="0"/>
-                </a:lnTo>
-                <a:lnTo>
-                  <a:pt x="120000" y="120000"/>
-                </a:lnTo>
-                <a:lnTo>
-                  <a:pt x="0" y="120000"/>
-                </a:lnTo>
-                <a:close/>
-              </a:path>
-            </a:pathLst>
-          </a:custGeom>
-        </p:spPr>
-      </p:sp>
-      <p:sp>
-        <p:nvSpPr>
-          <p:cNvPr id="257" name="Google Shape;257;g13a5e79da30_0_6:notes"/>
-          <p:cNvSpPr txBox="1">
-            <a:spLocks noGrp="1"/>
-          </p:cNvSpPr>
-          <p:nvPr>
-            <p:ph type="body" idx="1"/>
-          </p:nvPr>
-        </p:nvSpPr>
-        <p:spPr>
-          <a:xfrm>
-            <a:off x="685800" y="4343400"/>
-            <a:ext cx="5486400" cy="4114800"/>
-          </a:xfrm>
-          <a:prstGeom prst="rect">
-            <a:avLst/>
-          </a:prstGeom>
-        </p:spPr>
-        <p:txBody>
-          <a:bodyPr spcFirstLastPara="1" wrap="square" lIns="91425" tIns="45700" rIns="91425" bIns="45700" anchor="t" anchorCtr="0">
-            <a:noAutofit/>
-          </a:bodyPr>
-          <a:lstStyle/>
-          <a:p>
-            <a:pPr marL="0" lvl="0" indent="0" algn="l" rtl="0">
-              <a:spcBef>
-                <a:spcPts val="0"/>
-              </a:spcBef>
-              <a:spcAft>
-                <a:spcPts val="0"/>
-              </a:spcAft>
-              <a:buNone/>
-            </a:pPr>
-            <a:endParaRPr/>
-          </a:p>
-        </p:txBody>
-      </p:sp>
-    </p:spTree>
     <p:extLst>
       <p:ext uri="{BB962C8B-B14F-4D97-AF65-F5344CB8AC3E}">
         <p14:creationId xmlns:p14="http://schemas.microsoft.com/office/powerpoint/2010/main" val="885818198"/>
@@ -1625,7 +1415,7 @@
 </p:notes>
 </file>
 
-<file path=ppt/notesSlides/notesSlide5.xml><?xml version="1.0" encoding="utf-8"?>
+<file path=ppt/notesSlides/notesSlide4.xml><?xml version="1.0" encoding="utf-8"?>
 <p:notes xmlns:a="http://schemas.openxmlformats.org/drawingml/2006/main" xmlns:r="http://schemas.openxmlformats.org/officeDocument/2006/relationships" xmlns:p="http://schemas.openxmlformats.org/presentationml/2006/main" showMasterSp="0" showMasterPhAnim="0">
   <p:cSld>
     <p:spTree>
@@ -1729,7 +1519,7 @@
 </p:notes>
 </file>
 
-<file path=ppt/notesSlides/notesSlide6.xml><?xml version="1.0" encoding="utf-8"?>
+<file path=ppt/notesSlides/notesSlide5.xml><?xml version="1.0" encoding="utf-8"?>
 <p:notes xmlns:a="http://schemas.openxmlformats.org/drawingml/2006/main" xmlns:r="http://schemas.openxmlformats.org/officeDocument/2006/relationships" xmlns:p="http://schemas.openxmlformats.org/presentationml/2006/main" showMasterSp="0" showMasterPhAnim="0">
   <p:cSld>
     <p:spTree>
@@ -1790,6 +1580,110 @@
       <p:sp>
         <p:nvSpPr>
           <p:cNvPr id="283" name="Google Shape;283;g13c8f144e0a_1_6:notes"/>
+          <p:cNvSpPr txBox="1">
+            <a:spLocks noGrp="1"/>
+          </p:cNvSpPr>
+          <p:nvPr>
+            <p:ph type="body" idx="1"/>
+          </p:nvPr>
+        </p:nvSpPr>
+        <p:spPr>
+          <a:xfrm>
+            <a:off x="685800" y="4343400"/>
+            <a:ext cx="5486400" cy="4114800"/>
+          </a:xfrm>
+          <a:prstGeom prst="rect">
+            <a:avLst/>
+          </a:prstGeom>
+        </p:spPr>
+        <p:txBody>
+          <a:bodyPr spcFirstLastPara="1" wrap="square" lIns="91425" tIns="45700" rIns="91425" bIns="45700" anchor="t" anchorCtr="0">
+            <a:noAutofit/>
+          </a:bodyPr>
+          <a:lstStyle/>
+          <a:p>
+            <a:pPr marL="0" lvl="0" indent="0" algn="l" rtl="0">
+              <a:spcBef>
+                <a:spcPts val="0"/>
+              </a:spcBef>
+              <a:spcAft>
+                <a:spcPts val="0"/>
+              </a:spcAft>
+              <a:buNone/>
+            </a:pPr>
+            <a:endParaRPr/>
+          </a:p>
+        </p:txBody>
+      </p:sp>
+    </p:spTree>
+  </p:cSld>
+  <p:clrMapOvr>
+    <a:masterClrMapping/>
+  </p:clrMapOvr>
+</p:notes>
+</file>
+
+<file path=ppt/notesSlides/notesSlide6.xml><?xml version="1.0" encoding="utf-8"?>
+<p:notes xmlns:a="http://schemas.openxmlformats.org/drawingml/2006/main" xmlns:r="http://schemas.openxmlformats.org/officeDocument/2006/relationships" xmlns:p="http://schemas.openxmlformats.org/presentationml/2006/main" showMasterSp="0" showMasterPhAnim="0">
+  <p:cSld>
+    <p:spTree>
+      <p:nvGrpSpPr>
+        <p:cNvPr id="1" name="Shape 294"/>
+        <p:cNvGrpSpPr/>
+        <p:nvPr/>
+      </p:nvGrpSpPr>
+      <p:grpSpPr>
+        <a:xfrm>
+          <a:off x="0" y="0"/>
+          <a:ext cx="0" cy="0"/>
+          <a:chOff x="0" y="0"/>
+          <a:chExt cx="0" cy="0"/>
+        </a:xfrm>
+      </p:grpSpPr>
+      <p:sp>
+        <p:nvSpPr>
+          <p:cNvPr id="295" name="Google Shape;295;g2a9e95685d1_0_53:notes"/>
+          <p:cNvSpPr>
+            <a:spLocks noGrp="1" noRot="1" noChangeAspect="1"/>
+          </p:cNvSpPr>
+          <p:nvPr>
+            <p:ph type="sldImg" idx="2"/>
+          </p:nvPr>
+        </p:nvSpPr>
+        <p:spPr>
+          <a:xfrm>
+            <a:off x="381000" y="685800"/>
+            <a:ext cx="6096000" cy="3429000"/>
+          </a:xfrm>
+          <a:custGeom>
+            <a:avLst/>
+            <a:gdLst/>
+            <a:ahLst/>
+            <a:cxnLst/>
+            <a:rect l="l" t="t" r="r" b="b"/>
+            <a:pathLst>
+              <a:path w="120000" h="120000" extrusionOk="0">
+                <a:moveTo>
+                  <a:pt x="0" y="0"/>
+                </a:moveTo>
+                <a:lnTo>
+                  <a:pt x="120000" y="0"/>
+                </a:lnTo>
+                <a:lnTo>
+                  <a:pt x="120000" y="120000"/>
+                </a:lnTo>
+                <a:lnTo>
+                  <a:pt x="0" y="120000"/>
+                </a:lnTo>
+                <a:close/>
+              </a:path>
+            </a:pathLst>
+          </a:custGeom>
+        </p:spPr>
+      </p:sp>
+      <p:sp>
+        <p:nvSpPr>
+          <p:cNvPr id="296" name="Google Shape;296;g2a9e95685d1_0_53:notes"/>
           <p:cNvSpPr txBox="1">
             <a:spLocks noGrp="1"/>
           </p:cNvSpPr>
@@ -1930,6 +1824,11 @@
         </p:txBody>
       </p:sp>
     </p:spTree>
+    <p:extLst>
+      <p:ext uri="{BB962C8B-B14F-4D97-AF65-F5344CB8AC3E}">
+        <p14:creationId xmlns:p14="http://schemas.microsoft.com/office/powerpoint/2010/main" val="1412325568"/>
+      </p:ext>
+    </p:extLst>
   </p:cSld>
   <p:clrMapOvr>
     <a:masterClrMapping/>
@@ -2036,7 +1935,7 @@
     </p:spTree>
     <p:extLst>
       <p:ext uri="{BB962C8B-B14F-4D97-AF65-F5344CB8AC3E}">
-        <p14:creationId xmlns:p14="http://schemas.microsoft.com/office/powerpoint/2010/main" val="3970394926"/>
+        <p14:creationId xmlns:p14="http://schemas.microsoft.com/office/powerpoint/2010/main" val="2781227691"/>
       </p:ext>
     </p:extLst>
   </p:cSld>
@@ -2051,7 +1950,7 @@
   <p:cSld>
     <p:spTree>
       <p:nvGrpSpPr>
-        <p:cNvPr id="1" name="Shape 294"/>
+        <p:cNvPr id="1" name="Shape 307"/>
         <p:cNvGrpSpPr/>
         <p:nvPr/>
       </p:nvGrpSpPr>
@@ -2065,7 +1964,7 @@
       </p:grpSpPr>
       <p:sp>
         <p:nvSpPr>
-          <p:cNvPr id="295" name="Google Shape;295;g2a9e95685d1_0_53:notes"/>
+          <p:cNvPr id="308" name="Google Shape;308;g1874089cc04_0_7:notes"/>
           <p:cNvSpPr>
             <a:spLocks noGrp="1" noRot="1" noChangeAspect="1"/>
           </p:cNvSpPr>
@@ -2106,7 +2005,7 @@
       </p:sp>
       <p:sp>
         <p:nvSpPr>
-          <p:cNvPr id="296" name="Google Shape;296;g2a9e95685d1_0_53:notes"/>
+          <p:cNvPr id="309" name="Google Shape;309;g1874089cc04_0_7:notes"/>
           <p:cNvSpPr txBox="1">
             <a:spLocks noGrp="1"/>
           </p:cNvSpPr>
@@ -2143,11 +2042,6 @@
         </p:txBody>
       </p:sp>
     </p:spTree>
-    <p:extLst>
-      <p:ext uri="{BB962C8B-B14F-4D97-AF65-F5344CB8AC3E}">
-        <p14:creationId xmlns:p14="http://schemas.microsoft.com/office/powerpoint/2010/main" val="1145149983"/>
-      </p:ext>
-    </p:extLst>
   </p:cSld>
   <p:clrMapOvr>
     <a:masterClrMapping/>
@@ -26065,31 +25959,6 @@
       </p15:sldGuideLst>
     </p:ext>
   </p:extLst>
-</p:sldLayout>
-</file>
-
-<file path=ppt/slideLayouts/slideLayout31.xml><?xml version="1.0" encoding="utf-8"?>
-<p:sldLayout xmlns:a="http://schemas.openxmlformats.org/drawingml/2006/main" xmlns:r="http://schemas.openxmlformats.org/officeDocument/2006/relationships" xmlns:p="http://schemas.openxmlformats.org/presentationml/2006/main" matchingName="Custom">
-  <p:cSld name="Custom">
-    <p:spTree>
-      <p:nvGrpSpPr>
-        <p:cNvPr id="1" name="Shape 206"/>
-        <p:cNvGrpSpPr/>
-        <p:nvPr/>
-      </p:nvGrpSpPr>
-      <p:grpSpPr>
-        <a:xfrm>
-          <a:off x="0" y="0"/>
-          <a:ext cx="0" cy="0"/>
-          <a:chOff x="0" y="0"/>
-          <a:chExt cx="0" cy="0"/>
-        </a:xfrm>
-      </p:grpSpPr>
-    </p:spTree>
-  </p:cSld>
-  <p:clrMapOvr>
-    <a:masterClrMapping/>
-  </p:clrMapOvr>
 </p:sldLayout>
 </file>
 
@@ -32770,727 +32639,6 @@
 </p:sldMaster>
 </file>
 
-<file path=ppt/slideMasters/slideMaster4.xml><?xml version="1.0" encoding="utf-8"?>
-<p:sldMaster xmlns:a="http://schemas.openxmlformats.org/drawingml/2006/main" xmlns:r="http://schemas.openxmlformats.org/officeDocument/2006/relationships" xmlns:p="http://schemas.openxmlformats.org/presentationml/2006/main">
-  <p:cSld>
-    <p:bg>
-      <p:bgRef idx="1001">
-        <a:schemeClr val="bg1"/>
-      </p:bgRef>
-    </p:bg>
-    <p:spTree>
-      <p:nvGrpSpPr>
-        <p:cNvPr id="1" name="Shape 205"/>
-        <p:cNvGrpSpPr/>
-        <p:nvPr/>
-      </p:nvGrpSpPr>
-      <p:grpSpPr>
-        <a:xfrm>
-          <a:off x="0" y="0"/>
-          <a:ext cx="0" cy="0"/>
-          <a:chOff x="0" y="0"/>
-          <a:chExt cx="0" cy="0"/>
-        </a:xfrm>
-      </p:grpSpPr>
-    </p:spTree>
-  </p:cSld>
-  <p:clrMap bg1="lt1" tx1="dk1" bg2="dk2" tx2="lt2" accent1="accent1" accent2="accent2" accent3="accent3" accent4="accent4" accent5="accent5" accent6="accent6" hlink="hlink" folHlink="folHlink"/>
-  <p:sldLayoutIdLst>
-    <p:sldLayoutId id="2147483679" r:id="rId1"/>
-  </p:sldLayoutIdLst>
-  <p:hf hdr="0" ftr="0" dt="0"/>
-  <p:txStyles>
-    <p:titleStyle>
-      <a:defPPr marR="0" lvl="0" algn="l" rtl="0">
-        <a:lnSpc>
-          <a:spcPct val="100000"/>
-        </a:lnSpc>
-        <a:spcBef>
-          <a:spcPts val="0"/>
-        </a:spcBef>
-        <a:spcAft>
-          <a:spcPts val="0"/>
-        </a:spcAft>
-      </a:defPPr>
-      <a:lvl1pPr marR="0" lvl="0" algn="l" rtl="0">
-        <a:lnSpc>
-          <a:spcPct val="100000"/>
-        </a:lnSpc>
-        <a:spcBef>
-          <a:spcPts val="0"/>
-        </a:spcBef>
-        <a:spcAft>
-          <a:spcPts val="0"/>
-        </a:spcAft>
-        <a:buClr>
-          <a:srgbClr val="000000"/>
-        </a:buClr>
-        <a:buFont typeface="Arial"/>
-        <a:defRPr sz="1400" b="0" i="0" u="none" strike="noStrike" cap="none">
-          <a:solidFill>
-            <a:srgbClr val="000000"/>
-          </a:solidFill>
-          <a:latin typeface="Arial"/>
-          <a:ea typeface="Arial"/>
-          <a:cs typeface="Arial"/>
-          <a:sym typeface="Arial"/>
-        </a:defRPr>
-      </a:lvl1pPr>
-      <a:lvl2pPr marR="0" lvl="1" algn="l" rtl="0">
-        <a:lnSpc>
-          <a:spcPct val="100000"/>
-        </a:lnSpc>
-        <a:spcBef>
-          <a:spcPts val="0"/>
-        </a:spcBef>
-        <a:spcAft>
-          <a:spcPts val="0"/>
-        </a:spcAft>
-        <a:buClr>
-          <a:srgbClr val="000000"/>
-        </a:buClr>
-        <a:buFont typeface="Arial"/>
-        <a:defRPr sz="1400" b="0" i="0" u="none" strike="noStrike" cap="none">
-          <a:solidFill>
-            <a:srgbClr val="000000"/>
-          </a:solidFill>
-          <a:latin typeface="Arial"/>
-          <a:ea typeface="Arial"/>
-          <a:cs typeface="Arial"/>
-          <a:sym typeface="Arial"/>
-        </a:defRPr>
-      </a:lvl2pPr>
-      <a:lvl3pPr marR="0" lvl="2" algn="l" rtl="0">
-        <a:lnSpc>
-          <a:spcPct val="100000"/>
-        </a:lnSpc>
-        <a:spcBef>
-          <a:spcPts val="0"/>
-        </a:spcBef>
-        <a:spcAft>
-          <a:spcPts val="0"/>
-        </a:spcAft>
-        <a:buClr>
-          <a:srgbClr val="000000"/>
-        </a:buClr>
-        <a:buFont typeface="Arial"/>
-        <a:defRPr sz="1400" b="0" i="0" u="none" strike="noStrike" cap="none">
-          <a:solidFill>
-            <a:srgbClr val="000000"/>
-          </a:solidFill>
-          <a:latin typeface="Arial"/>
-          <a:ea typeface="Arial"/>
-          <a:cs typeface="Arial"/>
-          <a:sym typeface="Arial"/>
-        </a:defRPr>
-      </a:lvl3pPr>
-      <a:lvl4pPr marR="0" lvl="3" algn="l" rtl="0">
-        <a:lnSpc>
-          <a:spcPct val="100000"/>
-        </a:lnSpc>
-        <a:spcBef>
-          <a:spcPts val="0"/>
-        </a:spcBef>
-        <a:spcAft>
-          <a:spcPts val="0"/>
-        </a:spcAft>
-        <a:buClr>
-          <a:srgbClr val="000000"/>
-        </a:buClr>
-        <a:buFont typeface="Arial"/>
-        <a:defRPr sz="1400" b="0" i="0" u="none" strike="noStrike" cap="none">
-          <a:solidFill>
-            <a:srgbClr val="000000"/>
-          </a:solidFill>
-          <a:latin typeface="Arial"/>
-          <a:ea typeface="Arial"/>
-          <a:cs typeface="Arial"/>
-          <a:sym typeface="Arial"/>
-        </a:defRPr>
-      </a:lvl4pPr>
-      <a:lvl5pPr marR="0" lvl="4" algn="l" rtl="0">
-        <a:lnSpc>
-          <a:spcPct val="100000"/>
-        </a:lnSpc>
-        <a:spcBef>
-          <a:spcPts val="0"/>
-        </a:spcBef>
-        <a:spcAft>
-          <a:spcPts val="0"/>
-        </a:spcAft>
-        <a:buClr>
-          <a:srgbClr val="000000"/>
-        </a:buClr>
-        <a:buFont typeface="Arial"/>
-        <a:defRPr sz="1400" b="0" i="0" u="none" strike="noStrike" cap="none">
-          <a:solidFill>
-            <a:srgbClr val="000000"/>
-          </a:solidFill>
-          <a:latin typeface="Arial"/>
-          <a:ea typeface="Arial"/>
-          <a:cs typeface="Arial"/>
-          <a:sym typeface="Arial"/>
-        </a:defRPr>
-      </a:lvl5pPr>
-      <a:lvl6pPr marR="0" lvl="5" algn="l" rtl="0">
-        <a:lnSpc>
-          <a:spcPct val="100000"/>
-        </a:lnSpc>
-        <a:spcBef>
-          <a:spcPts val="0"/>
-        </a:spcBef>
-        <a:spcAft>
-          <a:spcPts val="0"/>
-        </a:spcAft>
-        <a:buClr>
-          <a:srgbClr val="000000"/>
-        </a:buClr>
-        <a:buFont typeface="Arial"/>
-        <a:defRPr sz="1400" b="0" i="0" u="none" strike="noStrike" cap="none">
-          <a:solidFill>
-            <a:srgbClr val="000000"/>
-          </a:solidFill>
-          <a:latin typeface="Arial"/>
-          <a:ea typeface="Arial"/>
-          <a:cs typeface="Arial"/>
-          <a:sym typeface="Arial"/>
-        </a:defRPr>
-      </a:lvl6pPr>
-      <a:lvl7pPr marR="0" lvl="6" algn="l" rtl="0">
-        <a:lnSpc>
-          <a:spcPct val="100000"/>
-        </a:lnSpc>
-        <a:spcBef>
-          <a:spcPts val="0"/>
-        </a:spcBef>
-        <a:spcAft>
-          <a:spcPts val="0"/>
-        </a:spcAft>
-        <a:buClr>
-          <a:srgbClr val="000000"/>
-        </a:buClr>
-        <a:buFont typeface="Arial"/>
-        <a:defRPr sz="1400" b="0" i="0" u="none" strike="noStrike" cap="none">
-          <a:solidFill>
-            <a:srgbClr val="000000"/>
-          </a:solidFill>
-          <a:latin typeface="Arial"/>
-          <a:ea typeface="Arial"/>
-          <a:cs typeface="Arial"/>
-          <a:sym typeface="Arial"/>
-        </a:defRPr>
-      </a:lvl7pPr>
-      <a:lvl8pPr marR="0" lvl="7" algn="l" rtl="0">
-        <a:lnSpc>
-          <a:spcPct val="100000"/>
-        </a:lnSpc>
-        <a:spcBef>
-          <a:spcPts val="0"/>
-        </a:spcBef>
-        <a:spcAft>
-          <a:spcPts val="0"/>
-        </a:spcAft>
-        <a:buClr>
-          <a:srgbClr val="000000"/>
-        </a:buClr>
-        <a:buFont typeface="Arial"/>
-        <a:defRPr sz="1400" b="0" i="0" u="none" strike="noStrike" cap="none">
-          <a:solidFill>
-            <a:srgbClr val="000000"/>
-          </a:solidFill>
-          <a:latin typeface="Arial"/>
-          <a:ea typeface="Arial"/>
-          <a:cs typeface="Arial"/>
-          <a:sym typeface="Arial"/>
-        </a:defRPr>
-      </a:lvl8pPr>
-      <a:lvl9pPr marR="0" lvl="8" algn="l" rtl="0">
-        <a:lnSpc>
-          <a:spcPct val="100000"/>
-        </a:lnSpc>
-        <a:spcBef>
-          <a:spcPts val="0"/>
-        </a:spcBef>
-        <a:spcAft>
-          <a:spcPts val="0"/>
-        </a:spcAft>
-        <a:buClr>
-          <a:srgbClr val="000000"/>
-        </a:buClr>
-        <a:buFont typeface="Arial"/>
-        <a:defRPr sz="1400" b="0" i="0" u="none" strike="noStrike" cap="none">
-          <a:solidFill>
-            <a:srgbClr val="000000"/>
-          </a:solidFill>
-          <a:latin typeface="Arial"/>
-          <a:ea typeface="Arial"/>
-          <a:cs typeface="Arial"/>
-          <a:sym typeface="Arial"/>
-        </a:defRPr>
-      </a:lvl9pPr>
-    </p:titleStyle>
-    <p:bodyStyle>
-      <a:defPPr marR="0" lvl="0" algn="l" rtl="0">
-        <a:lnSpc>
-          <a:spcPct val="100000"/>
-        </a:lnSpc>
-        <a:spcBef>
-          <a:spcPts val="0"/>
-        </a:spcBef>
-        <a:spcAft>
-          <a:spcPts val="0"/>
-        </a:spcAft>
-      </a:defPPr>
-      <a:lvl1pPr marR="0" lvl="0" algn="l" rtl="0">
-        <a:lnSpc>
-          <a:spcPct val="100000"/>
-        </a:lnSpc>
-        <a:spcBef>
-          <a:spcPts val="0"/>
-        </a:spcBef>
-        <a:spcAft>
-          <a:spcPts val="0"/>
-        </a:spcAft>
-        <a:buClr>
-          <a:srgbClr val="000000"/>
-        </a:buClr>
-        <a:buFont typeface="Arial"/>
-        <a:defRPr sz="1400" b="0" i="0" u="none" strike="noStrike" cap="none">
-          <a:solidFill>
-            <a:srgbClr val="000000"/>
-          </a:solidFill>
-          <a:latin typeface="Arial"/>
-          <a:ea typeface="Arial"/>
-          <a:cs typeface="Arial"/>
-          <a:sym typeface="Arial"/>
-        </a:defRPr>
-      </a:lvl1pPr>
-      <a:lvl2pPr marR="0" lvl="1" algn="l" rtl="0">
-        <a:lnSpc>
-          <a:spcPct val="100000"/>
-        </a:lnSpc>
-        <a:spcBef>
-          <a:spcPts val="0"/>
-        </a:spcBef>
-        <a:spcAft>
-          <a:spcPts val="0"/>
-        </a:spcAft>
-        <a:buClr>
-          <a:srgbClr val="000000"/>
-        </a:buClr>
-        <a:buFont typeface="Arial"/>
-        <a:defRPr sz="1400" b="0" i="0" u="none" strike="noStrike" cap="none">
-          <a:solidFill>
-            <a:srgbClr val="000000"/>
-          </a:solidFill>
-          <a:latin typeface="Arial"/>
-          <a:ea typeface="Arial"/>
-          <a:cs typeface="Arial"/>
-          <a:sym typeface="Arial"/>
-        </a:defRPr>
-      </a:lvl2pPr>
-      <a:lvl3pPr marR="0" lvl="2" algn="l" rtl="0">
-        <a:lnSpc>
-          <a:spcPct val="100000"/>
-        </a:lnSpc>
-        <a:spcBef>
-          <a:spcPts val="0"/>
-        </a:spcBef>
-        <a:spcAft>
-          <a:spcPts val="0"/>
-        </a:spcAft>
-        <a:buClr>
-          <a:srgbClr val="000000"/>
-        </a:buClr>
-        <a:buFont typeface="Arial"/>
-        <a:defRPr sz="1400" b="0" i="0" u="none" strike="noStrike" cap="none">
-          <a:solidFill>
-            <a:srgbClr val="000000"/>
-          </a:solidFill>
-          <a:latin typeface="Arial"/>
-          <a:ea typeface="Arial"/>
-          <a:cs typeface="Arial"/>
-          <a:sym typeface="Arial"/>
-        </a:defRPr>
-      </a:lvl3pPr>
-      <a:lvl4pPr marR="0" lvl="3" algn="l" rtl="0">
-        <a:lnSpc>
-          <a:spcPct val="100000"/>
-        </a:lnSpc>
-        <a:spcBef>
-          <a:spcPts val="0"/>
-        </a:spcBef>
-        <a:spcAft>
-          <a:spcPts val="0"/>
-        </a:spcAft>
-        <a:buClr>
-          <a:srgbClr val="000000"/>
-        </a:buClr>
-        <a:buFont typeface="Arial"/>
-        <a:defRPr sz="1400" b="0" i="0" u="none" strike="noStrike" cap="none">
-          <a:solidFill>
-            <a:srgbClr val="000000"/>
-          </a:solidFill>
-          <a:latin typeface="Arial"/>
-          <a:ea typeface="Arial"/>
-          <a:cs typeface="Arial"/>
-          <a:sym typeface="Arial"/>
-        </a:defRPr>
-      </a:lvl4pPr>
-      <a:lvl5pPr marR="0" lvl="4" algn="l" rtl="0">
-        <a:lnSpc>
-          <a:spcPct val="100000"/>
-        </a:lnSpc>
-        <a:spcBef>
-          <a:spcPts val="0"/>
-        </a:spcBef>
-        <a:spcAft>
-          <a:spcPts val="0"/>
-        </a:spcAft>
-        <a:buClr>
-          <a:srgbClr val="000000"/>
-        </a:buClr>
-        <a:buFont typeface="Arial"/>
-        <a:defRPr sz="1400" b="0" i="0" u="none" strike="noStrike" cap="none">
-          <a:solidFill>
-            <a:srgbClr val="000000"/>
-          </a:solidFill>
-          <a:latin typeface="Arial"/>
-          <a:ea typeface="Arial"/>
-          <a:cs typeface="Arial"/>
-          <a:sym typeface="Arial"/>
-        </a:defRPr>
-      </a:lvl5pPr>
-      <a:lvl6pPr marR="0" lvl="5" algn="l" rtl="0">
-        <a:lnSpc>
-          <a:spcPct val="100000"/>
-        </a:lnSpc>
-        <a:spcBef>
-          <a:spcPts val="0"/>
-        </a:spcBef>
-        <a:spcAft>
-          <a:spcPts val="0"/>
-        </a:spcAft>
-        <a:buClr>
-          <a:srgbClr val="000000"/>
-        </a:buClr>
-        <a:buFont typeface="Arial"/>
-        <a:defRPr sz="1400" b="0" i="0" u="none" strike="noStrike" cap="none">
-          <a:solidFill>
-            <a:srgbClr val="000000"/>
-          </a:solidFill>
-          <a:latin typeface="Arial"/>
-          <a:ea typeface="Arial"/>
-          <a:cs typeface="Arial"/>
-          <a:sym typeface="Arial"/>
-        </a:defRPr>
-      </a:lvl6pPr>
-      <a:lvl7pPr marR="0" lvl="6" algn="l" rtl="0">
-        <a:lnSpc>
-          <a:spcPct val="100000"/>
-        </a:lnSpc>
-        <a:spcBef>
-          <a:spcPts val="0"/>
-        </a:spcBef>
-        <a:spcAft>
-          <a:spcPts val="0"/>
-        </a:spcAft>
-        <a:buClr>
-          <a:srgbClr val="000000"/>
-        </a:buClr>
-        <a:buFont typeface="Arial"/>
-        <a:defRPr sz="1400" b="0" i="0" u="none" strike="noStrike" cap="none">
-          <a:solidFill>
-            <a:srgbClr val="000000"/>
-          </a:solidFill>
-          <a:latin typeface="Arial"/>
-          <a:ea typeface="Arial"/>
-          <a:cs typeface="Arial"/>
-          <a:sym typeface="Arial"/>
-        </a:defRPr>
-      </a:lvl7pPr>
-      <a:lvl8pPr marR="0" lvl="7" algn="l" rtl="0">
-        <a:lnSpc>
-          <a:spcPct val="100000"/>
-        </a:lnSpc>
-        <a:spcBef>
-          <a:spcPts val="0"/>
-        </a:spcBef>
-        <a:spcAft>
-          <a:spcPts val="0"/>
-        </a:spcAft>
-        <a:buClr>
-          <a:srgbClr val="000000"/>
-        </a:buClr>
-        <a:buFont typeface="Arial"/>
-        <a:defRPr sz="1400" b="0" i="0" u="none" strike="noStrike" cap="none">
-          <a:solidFill>
-            <a:srgbClr val="000000"/>
-          </a:solidFill>
-          <a:latin typeface="Arial"/>
-          <a:ea typeface="Arial"/>
-          <a:cs typeface="Arial"/>
-          <a:sym typeface="Arial"/>
-        </a:defRPr>
-      </a:lvl8pPr>
-      <a:lvl9pPr marR="0" lvl="8" algn="l" rtl="0">
-        <a:lnSpc>
-          <a:spcPct val="100000"/>
-        </a:lnSpc>
-        <a:spcBef>
-          <a:spcPts val="0"/>
-        </a:spcBef>
-        <a:spcAft>
-          <a:spcPts val="0"/>
-        </a:spcAft>
-        <a:buClr>
-          <a:srgbClr val="000000"/>
-        </a:buClr>
-        <a:buFont typeface="Arial"/>
-        <a:defRPr sz="1400" b="0" i="0" u="none" strike="noStrike" cap="none">
-          <a:solidFill>
-            <a:srgbClr val="000000"/>
-          </a:solidFill>
-          <a:latin typeface="Arial"/>
-          <a:ea typeface="Arial"/>
-          <a:cs typeface="Arial"/>
-          <a:sym typeface="Arial"/>
-        </a:defRPr>
-      </a:lvl9pPr>
-    </p:bodyStyle>
-    <p:otherStyle>
-      <a:defPPr marR="0" lvl="0" algn="l" rtl="0">
-        <a:lnSpc>
-          <a:spcPct val="100000"/>
-        </a:lnSpc>
-        <a:spcBef>
-          <a:spcPts val="0"/>
-        </a:spcBef>
-        <a:spcAft>
-          <a:spcPts val="0"/>
-        </a:spcAft>
-      </a:defPPr>
-      <a:lvl1pPr marR="0" lvl="0" algn="l" rtl="0">
-        <a:lnSpc>
-          <a:spcPct val="100000"/>
-        </a:lnSpc>
-        <a:spcBef>
-          <a:spcPts val="0"/>
-        </a:spcBef>
-        <a:spcAft>
-          <a:spcPts val="0"/>
-        </a:spcAft>
-        <a:buClr>
-          <a:srgbClr val="000000"/>
-        </a:buClr>
-        <a:buFont typeface="Arial"/>
-        <a:defRPr sz="1400" b="0" i="0" u="none" strike="noStrike" cap="none">
-          <a:solidFill>
-            <a:srgbClr val="000000"/>
-          </a:solidFill>
-          <a:latin typeface="Arial"/>
-          <a:ea typeface="Arial"/>
-          <a:cs typeface="Arial"/>
-          <a:sym typeface="Arial"/>
-        </a:defRPr>
-      </a:lvl1pPr>
-      <a:lvl2pPr marR="0" lvl="1" algn="l" rtl="0">
-        <a:lnSpc>
-          <a:spcPct val="100000"/>
-        </a:lnSpc>
-        <a:spcBef>
-          <a:spcPts val="0"/>
-        </a:spcBef>
-        <a:spcAft>
-          <a:spcPts val="0"/>
-        </a:spcAft>
-        <a:buClr>
-          <a:srgbClr val="000000"/>
-        </a:buClr>
-        <a:buFont typeface="Arial"/>
-        <a:defRPr sz="1400" b="0" i="0" u="none" strike="noStrike" cap="none">
-          <a:solidFill>
-            <a:srgbClr val="000000"/>
-          </a:solidFill>
-          <a:latin typeface="Arial"/>
-          <a:ea typeface="Arial"/>
-          <a:cs typeface="Arial"/>
-          <a:sym typeface="Arial"/>
-        </a:defRPr>
-      </a:lvl2pPr>
-      <a:lvl3pPr marR="0" lvl="2" algn="l" rtl="0">
-        <a:lnSpc>
-          <a:spcPct val="100000"/>
-        </a:lnSpc>
-        <a:spcBef>
-          <a:spcPts val="0"/>
-        </a:spcBef>
-        <a:spcAft>
-          <a:spcPts val="0"/>
-        </a:spcAft>
-        <a:buClr>
-          <a:srgbClr val="000000"/>
-        </a:buClr>
-        <a:buFont typeface="Arial"/>
-        <a:defRPr sz="1400" b="0" i="0" u="none" strike="noStrike" cap="none">
-          <a:solidFill>
-            <a:srgbClr val="000000"/>
-          </a:solidFill>
-          <a:latin typeface="Arial"/>
-          <a:ea typeface="Arial"/>
-          <a:cs typeface="Arial"/>
-          <a:sym typeface="Arial"/>
-        </a:defRPr>
-      </a:lvl3pPr>
-      <a:lvl4pPr marR="0" lvl="3" algn="l" rtl="0">
-        <a:lnSpc>
-          <a:spcPct val="100000"/>
-        </a:lnSpc>
-        <a:spcBef>
-          <a:spcPts val="0"/>
-        </a:spcBef>
-        <a:spcAft>
-          <a:spcPts val="0"/>
-        </a:spcAft>
-        <a:buClr>
-          <a:srgbClr val="000000"/>
-        </a:buClr>
-        <a:buFont typeface="Arial"/>
-        <a:defRPr sz="1400" b="0" i="0" u="none" strike="noStrike" cap="none">
-          <a:solidFill>
-            <a:srgbClr val="000000"/>
-          </a:solidFill>
-          <a:latin typeface="Arial"/>
-          <a:ea typeface="Arial"/>
-          <a:cs typeface="Arial"/>
-          <a:sym typeface="Arial"/>
-        </a:defRPr>
-      </a:lvl4pPr>
-      <a:lvl5pPr marR="0" lvl="4" algn="l" rtl="0">
-        <a:lnSpc>
-          <a:spcPct val="100000"/>
-        </a:lnSpc>
-        <a:spcBef>
-          <a:spcPts val="0"/>
-        </a:spcBef>
-        <a:spcAft>
-          <a:spcPts val="0"/>
-        </a:spcAft>
-        <a:buClr>
-          <a:srgbClr val="000000"/>
-        </a:buClr>
-        <a:buFont typeface="Arial"/>
-        <a:defRPr sz="1400" b="0" i="0" u="none" strike="noStrike" cap="none">
-          <a:solidFill>
-            <a:srgbClr val="000000"/>
-          </a:solidFill>
-          <a:latin typeface="Arial"/>
-          <a:ea typeface="Arial"/>
-          <a:cs typeface="Arial"/>
-          <a:sym typeface="Arial"/>
-        </a:defRPr>
-      </a:lvl5pPr>
-      <a:lvl6pPr marR="0" lvl="5" algn="l" rtl="0">
-        <a:lnSpc>
-          <a:spcPct val="100000"/>
-        </a:lnSpc>
-        <a:spcBef>
-          <a:spcPts val="0"/>
-        </a:spcBef>
-        <a:spcAft>
-          <a:spcPts val="0"/>
-        </a:spcAft>
-        <a:buClr>
-          <a:srgbClr val="000000"/>
-        </a:buClr>
-        <a:buFont typeface="Arial"/>
-        <a:defRPr sz="1400" b="0" i="0" u="none" strike="noStrike" cap="none">
-          <a:solidFill>
-            <a:srgbClr val="000000"/>
-          </a:solidFill>
-          <a:latin typeface="Arial"/>
-          <a:ea typeface="Arial"/>
-          <a:cs typeface="Arial"/>
-          <a:sym typeface="Arial"/>
-        </a:defRPr>
-      </a:lvl6pPr>
-      <a:lvl7pPr marR="0" lvl="6" algn="l" rtl="0">
-        <a:lnSpc>
-          <a:spcPct val="100000"/>
-        </a:lnSpc>
-        <a:spcBef>
-          <a:spcPts val="0"/>
-        </a:spcBef>
-        <a:spcAft>
-          <a:spcPts val="0"/>
-        </a:spcAft>
-        <a:buClr>
-          <a:srgbClr val="000000"/>
-        </a:buClr>
-        <a:buFont typeface="Arial"/>
-        <a:defRPr sz="1400" b="0" i="0" u="none" strike="noStrike" cap="none">
-          <a:solidFill>
-            <a:srgbClr val="000000"/>
-          </a:solidFill>
-          <a:latin typeface="Arial"/>
-          <a:ea typeface="Arial"/>
-          <a:cs typeface="Arial"/>
-          <a:sym typeface="Arial"/>
-        </a:defRPr>
-      </a:lvl7pPr>
-      <a:lvl8pPr marR="0" lvl="7" algn="l" rtl="0">
-        <a:lnSpc>
-          <a:spcPct val="100000"/>
-        </a:lnSpc>
-        <a:spcBef>
-          <a:spcPts val="0"/>
-        </a:spcBef>
-        <a:spcAft>
-          <a:spcPts val="0"/>
-        </a:spcAft>
-        <a:buClr>
-          <a:srgbClr val="000000"/>
-        </a:buClr>
-        <a:buFont typeface="Arial"/>
-        <a:defRPr sz="1400" b="0" i="0" u="none" strike="noStrike" cap="none">
-          <a:solidFill>
-            <a:srgbClr val="000000"/>
-          </a:solidFill>
-          <a:latin typeface="Arial"/>
-          <a:ea typeface="Arial"/>
-          <a:cs typeface="Arial"/>
-          <a:sym typeface="Arial"/>
-        </a:defRPr>
-      </a:lvl8pPr>
-      <a:lvl9pPr marR="0" lvl="8" algn="l" rtl="0">
-        <a:lnSpc>
-          <a:spcPct val="100000"/>
-        </a:lnSpc>
-        <a:spcBef>
-          <a:spcPts val="0"/>
-        </a:spcBef>
-        <a:spcAft>
-          <a:spcPts val="0"/>
-        </a:spcAft>
-        <a:buClr>
-          <a:srgbClr val="000000"/>
-        </a:buClr>
-        <a:buFont typeface="Arial"/>
-        <a:defRPr sz="1400" b="0" i="0" u="none" strike="noStrike" cap="none">
-          <a:solidFill>
-            <a:srgbClr val="000000"/>
-          </a:solidFill>
-          <a:latin typeface="Arial"/>
-          <a:ea typeface="Arial"/>
-          <a:cs typeface="Arial"/>
-          <a:sym typeface="Arial"/>
-        </a:defRPr>
-      </a:lvl9pPr>
-    </p:otherStyle>
-  </p:txStyles>
-</p:sldMaster>
-</file>
-
 <file path=ppt/slides/slide1.xml><?xml version="1.0" encoding="utf-8"?>
 <p:sld xmlns:a="http://schemas.openxmlformats.org/drawingml/2006/main" xmlns:r="http://schemas.openxmlformats.org/officeDocument/2006/relationships" xmlns:p="http://schemas.openxmlformats.org/presentationml/2006/main">
   <p:cSld>
@@ -33517,7 +32665,7 @@
         <p:spPr>
           <a:xfrm>
             <a:off x="319074" y="294016"/>
-            <a:ext cx="8566500" cy="1709186"/>
+            <a:ext cx="8566500" cy="2300117"/>
           </a:xfrm>
           <a:prstGeom prst="rect">
             <a:avLst/>
@@ -33562,7 +32710,75 @@
               </a:rPr>
               <a:t>Исследование данных супермаркета</a:t>
             </a:r>
-            <a:endParaRPr sz="4300" b="1" i="0" u="none" strike="noStrike" cap="none" dirty="0">
+            <a:endParaRPr lang="ru-RU" sz="1600" b="1" dirty="0">
+              <a:solidFill>
+                <a:schemeClr val="lt1"/>
+              </a:solidFill>
+              <a:latin typeface="Proxima Nova"/>
+              <a:ea typeface="Proxima Nova"/>
+              <a:cs typeface="Proxima Nova"/>
+              <a:sym typeface="Proxima Nova"/>
+            </a:endParaRPr>
+          </a:p>
+          <a:p>
+            <a:pPr marL="0" lvl="0" indent="0" algn="l" rtl="0">
+              <a:lnSpc>
+                <a:spcPct val="80000"/>
+              </a:lnSpc>
+              <a:spcBef>
+                <a:spcPts val="0"/>
+              </a:spcBef>
+              <a:spcAft>
+                <a:spcPts val="0"/>
+              </a:spcAft>
+              <a:buClr>
+                <a:schemeClr val="dk1"/>
+              </a:buClr>
+              <a:buSzPts val="4800"/>
+              <a:buFont typeface="Arial"/>
+              <a:buNone/>
+            </a:pPr>
+            <a:endParaRPr lang="ru-RU" sz="1600" b="1" dirty="0">
+              <a:solidFill>
+                <a:schemeClr val="lt1"/>
+              </a:solidFill>
+              <a:latin typeface="Proxima Nova"/>
+              <a:ea typeface="Proxima Nova"/>
+              <a:cs typeface="Proxima Nova"/>
+              <a:sym typeface="Proxima Nova"/>
+            </a:endParaRPr>
+          </a:p>
+          <a:p>
+            <a:pPr marL="0" lvl="0" indent="0" algn="l" rtl="0">
+              <a:lnSpc>
+                <a:spcPct val="80000"/>
+              </a:lnSpc>
+              <a:spcBef>
+                <a:spcPts val="0"/>
+              </a:spcBef>
+              <a:spcAft>
+                <a:spcPts val="0"/>
+              </a:spcAft>
+              <a:buClr>
+                <a:schemeClr val="dk1"/>
+              </a:buClr>
+              <a:buSzPts val="4800"/>
+              <a:buFont typeface="Arial"/>
+              <a:buNone/>
+            </a:pPr>
+            <a:r>
+              <a:rPr lang="ru-RU" sz="1600" b="1" dirty="0">
+                <a:solidFill>
+                  <a:schemeClr val="lt1"/>
+                </a:solidFill>
+                <a:latin typeface="Proxima Nova"/>
+                <a:ea typeface="Proxima Nova"/>
+                <a:cs typeface="Proxima Nova"/>
+                <a:sym typeface="Proxima Nova"/>
+              </a:rPr>
+              <a:t>(поиск инсайтов, составление рекомендаций стейкхолдерам, построение дашборда)</a:t>
+            </a:r>
+            <a:endParaRPr sz="1600" b="1" i="0" u="none" strike="noStrike" cap="none" dirty="0">
               <a:solidFill>
                 <a:schemeClr val="lt1"/>
               </a:solidFill>
@@ -34039,564 +33255,6 @@
         <p:spPr>
           <a:xfrm>
             <a:off x="322550" y="1096805"/>
-            <a:ext cx="8498900" cy="2949889"/>
-          </a:xfrm>
-          <a:prstGeom prst="rect">
-            <a:avLst/>
-          </a:prstGeom>
-          <a:noFill/>
-          <a:ln>
-            <a:noFill/>
-          </a:ln>
-        </p:spPr>
-        <p:txBody>
-          <a:bodyPr spcFirstLastPara="1" wrap="square" lIns="45725" tIns="45725" rIns="45725" bIns="45725" numCol="2" anchor="t" anchorCtr="0">
-            <a:noAutofit/>
-          </a:bodyPr>
-          <a:lstStyle/>
-          <a:p>
-            <a:pPr marL="457200" lvl="0" indent="-304800" algn="l" rtl="0">
-              <a:lnSpc>
-                <a:spcPct val="150000"/>
-              </a:lnSpc>
-              <a:spcBef>
-                <a:spcPts val="0"/>
-              </a:spcBef>
-              <a:spcAft>
-                <a:spcPts val="0"/>
-              </a:spcAft>
-              <a:buClr>
-                <a:srgbClr val="4BD0A0"/>
-              </a:buClr>
-              <a:buSzPts val="1200"/>
-              <a:buFont typeface="Proxima Nova"/>
-              <a:buChar char="●"/>
-            </a:pPr>
-            <a:r>
-              <a:rPr lang="ru-RU" sz="1100" dirty="0">
-                <a:solidFill>
-                  <a:schemeClr val="dk1"/>
-                </a:solidFill>
-                <a:latin typeface="Proxima Nova"/>
-                <a:ea typeface="Proxima Nova"/>
-                <a:cs typeface="Proxima Nova"/>
-                <a:sym typeface="Proxima Nova"/>
-              </a:rPr>
-              <a:t>общая выручка более 2 млн. долларов</a:t>
-            </a:r>
-          </a:p>
-          <a:p>
-            <a:pPr marL="457200" lvl="0" indent="-304800" algn="l" rtl="0">
-              <a:lnSpc>
-                <a:spcPct val="150000"/>
-              </a:lnSpc>
-              <a:spcBef>
-                <a:spcPts val="0"/>
-              </a:spcBef>
-              <a:spcAft>
-                <a:spcPts val="0"/>
-              </a:spcAft>
-              <a:buClr>
-                <a:srgbClr val="4BD0A0"/>
-              </a:buClr>
-              <a:buSzPts val="1200"/>
-              <a:buFont typeface="Proxima Nova"/>
-              <a:buChar char="●"/>
-            </a:pPr>
-            <a:r>
-              <a:rPr lang="ru-RU" sz="1100" dirty="0">
-                <a:solidFill>
-                  <a:schemeClr val="dk1"/>
-                </a:solidFill>
-                <a:latin typeface="Proxima Nova"/>
-                <a:ea typeface="Proxima Nova"/>
-                <a:cs typeface="Proxima Nova"/>
-                <a:sym typeface="Proxima Nova"/>
-              </a:rPr>
-              <a:t>общее количество заказов около 5 тысяч</a:t>
-            </a:r>
-          </a:p>
-          <a:p>
-            <a:pPr marL="457200" lvl="0" indent="-304800" algn="l" rtl="0">
-              <a:lnSpc>
-                <a:spcPct val="150000"/>
-              </a:lnSpc>
-              <a:spcBef>
-                <a:spcPts val="0"/>
-              </a:spcBef>
-              <a:spcAft>
-                <a:spcPts val="0"/>
-              </a:spcAft>
-              <a:buClr>
-                <a:srgbClr val="4BD0A0"/>
-              </a:buClr>
-              <a:buSzPts val="1200"/>
-              <a:buFont typeface="Proxima Nova"/>
-              <a:buChar char="●"/>
-            </a:pPr>
-            <a:r>
-              <a:rPr lang="ru-RU" sz="1100" dirty="0">
-                <a:solidFill>
-                  <a:schemeClr val="dk1"/>
-                </a:solidFill>
-                <a:latin typeface="Proxima Nova"/>
-                <a:ea typeface="Proxima Nova"/>
-                <a:cs typeface="Proxima Nova"/>
-                <a:sym typeface="Proxima Nova"/>
-              </a:rPr>
-              <a:t>лидеры по продажам и заказам: штат Калифорния, город Нью-Йорк, сегмент – </a:t>
-            </a:r>
-            <a:r>
-              <a:rPr lang="en-US" sz="1100" dirty="0">
-                <a:solidFill>
-                  <a:schemeClr val="dk1"/>
-                </a:solidFill>
-                <a:latin typeface="Proxima Nova"/>
-                <a:ea typeface="Proxima Nova"/>
-                <a:cs typeface="Proxima Nova"/>
-                <a:sym typeface="Proxima Nova"/>
-              </a:rPr>
-              <a:t>Consumer,</a:t>
-            </a:r>
-            <a:r>
-              <a:rPr lang="ru-RU" sz="1100" dirty="0">
-                <a:solidFill>
-                  <a:schemeClr val="dk1"/>
-                </a:solidFill>
-                <a:latin typeface="Proxima Nova"/>
-                <a:ea typeface="Proxima Nova"/>
-                <a:cs typeface="Proxima Nova"/>
-                <a:sym typeface="Proxima Nova"/>
-              </a:rPr>
-              <a:t> категория – технологии, подкатегория – телефоны</a:t>
-            </a:r>
-          </a:p>
-          <a:p>
-            <a:pPr marL="457200" lvl="0" indent="-304800" algn="l" rtl="0">
-              <a:lnSpc>
-                <a:spcPct val="150000"/>
-              </a:lnSpc>
-              <a:spcBef>
-                <a:spcPts val="0"/>
-              </a:spcBef>
-              <a:spcAft>
-                <a:spcPts val="0"/>
-              </a:spcAft>
-              <a:buClr>
-                <a:srgbClr val="4BD0A0"/>
-              </a:buClr>
-              <a:buSzPts val="1200"/>
-              <a:buFont typeface="Proxima Nova"/>
-              <a:buChar char="●"/>
-            </a:pPr>
-            <a:r>
-              <a:rPr lang="ru-RU" sz="1100" dirty="0">
-                <a:solidFill>
-                  <a:schemeClr val="dk1"/>
-                </a:solidFill>
-                <a:latin typeface="Proxima Nova"/>
-                <a:ea typeface="Proxima Nova"/>
-                <a:cs typeface="Proxima Nova"/>
-                <a:sym typeface="Proxima Nova"/>
-              </a:rPr>
-              <a:t>имеют наиболее низкие показатели: штат Северная Дакота, город Миссури, сегмент – домашний офис, категория – офисные принадлежности, подкатегория – крепежи</a:t>
-            </a:r>
-          </a:p>
-          <a:p>
-            <a:pPr marL="457200" lvl="0" indent="-304800" algn="l" rtl="0">
-              <a:lnSpc>
-                <a:spcPct val="150000"/>
-              </a:lnSpc>
-              <a:spcBef>
-                <a:spcPts val="0"/>
-              </a:spcBef>
-              <a:spcAft>
-                <a:spcPts val="0"/>
-              </a:spcAft>
-              <a:buClr>
-                <a:srgbClr val="4BD0A0"/>
-              </a:buClr>
-              <a:buSzPts val="1200"/>
-              <a:buFont typeface="Proxima Nova"/>
-              <a:buChar char="●"/>
-            </a:pPr>
-            <a:r>
-              <a:rPr lang="ru-RU" sz="1100" dirty="0">
-                <a:solidFill>
-                  <a:schemeClr val="dk1"/>
-                </a:solidFill>
-                <a:latin typeface="Proxima Nova"/>
-              </a:rPr>
-              <a:t>средний чек сегмента «</a:t>
-            </a:r>
-            <a:r>
-              <a:rPr lang="ru-RU" sz="1100" dirty="0" err="1">
-                <a:solidFill>
-                  <a:schemeClr val="dk1"/>
-                </a:solidFill>
-                <a:latin typeface="Proxima Nova"/>
-              </a:rPr>
-              <a:t>C</a:t>
-            </a:r>
-            <a:r>
-              <a:rPr lang="en-US" sz="1100" dirty="0" err="1">
-                <a:solidFill>
-                  <a:schemeClr val="dk1"/>
-                </a:solidFill>
-                <a:latin typeface="Proxima Nova"/>
-              </a:rPr>
-              <a:t>orporate</a:t>
-            </a:r>
-            <a:r>
-              <a:rPr lang="ru-RU" sz="1100" dirty="0">
-                <a:solidFill>
-                  <a:schemeClr val="dk1"/>
-                </a:solidFill>
-                <a:latin typeface="Proxima Nova"/>
-              </a:rPr>
-              <a:t>» - 467,77 $, гипотеза неверная</a:t>
-            </a:r>
-          </a:p>
-          <a:p>
-            <a:pPr marL="457200" lvl="0" indent="-304800" algn="l" rtl="0">
-              <a:lnSpc>
-                <a:spcPct val="150000"/>
-              </a:lnSpc>
-              <a:spcBef>
-                <a:spcPts val="0"/>
-              </a:spcBef>
-              <a:spcAft>
-                <a:spcPts val="0"/>
-              </a:spcAft>
-              <a:buClr>
-                <a:srgbClr val="4BD0A0"/>
-              </a:buClr>
-              <a:buSzPts val="1200"/>
-              <a:buFont typeface="Proxima Nova"/>
-              <a:buChar char="●"/>
-            </a:pPr>
-            <a:r>
-              <a:rPr lang="ru-RU" sz="1100" dirty="0">
-                <a:solidFill>
-                  <a:schemeClr val="dk1"/>
-                </a:solidFill>
-                <a:latin typeface="Proxima Nova"/>
-                <a:sym typeface="Proxima Nova"/>
-              </a:rPr>
-              <a:t>заметна положительная динамика роста продаж</a:t>
-            </a:r>
-          </a:p>
-          <a:p>
-            <a:pPr marL="457200" lvl="0" indent="-304800" algn="l" rtl="0">
-              <a:lnSpc>
-                <a:spcPct val="150000"/>
-              </a:lnSpc>
-              <a:spcBef>
-                <a:spcPts val="0"/>
-              </a:spcBef>
-              <a:spcAft>
-                <a:spcPts val="0"/>
-              </a:spcAft>
-              <a:buClr>
-                <a:srgbClr val="4BD0A0"/>
-              </a:buClr>
-              <a:buSzPts val="1200"/>
-              <a:buFont typeface="Proxima Nova"/>
-              <a:buChar char="●"/>
-            </a:pPr>
-            <a:r>
-              <a:rPr lang="ru-RU" sz="1100" dirty="0">
-                <a:solidFill>
-                  <a:schemeClr val="dk1"/>
-                </a:solidFill>
-                <a:latin typeface="Proxima Nova"/>
-                <a:sym typeface="Proxima Nova"/>
-              </a:rPr>
-              <a:t>чаще всего пользуются стандартной доставкой</a:t>
-            </a:r>
-          </a:p>
-          <a:p>
-            <a:pPr marL="457200" lvl="0" indent="-304800" algn="l" rtl="0">
-              <a:lnSpc>
-                <a:spcPct val="150000"/>
-              </a:lnSpc>
-              <a:spcBef>
-                <a:spcPts val="0"/>
-              </a:spcBef>
-              <a:spcAft>
-                <a:spcPts val="0"/>
-              </a:spcAft>
-              <a:buClr>
-                <a:srgbClr val="4BD0A0"/>
-              </a:buClr>
-              <a:buSzPts val="1200"/>
-              <a:buFont typeface="Proxima Nova"/>
-              <a:buChar char="●"/>
-            </a:pPr>
-            <a:r>
-              <a:rPr lang="ru-RU" sz="1100" dirty="0">
-                <a:solidFill>
-                  <a:schemeClr val="dk1"/>
-                </a:solidFill>
-                <a:latin typeface="Proxima Nova"/>
-              </a:rPr>
-              <a:t>доля повторных покупок в каждом типе доставок практически одинаковая – гипотеза неверная </a:t>
-            </a:r>
-          </a:p>
-          <a:p>
-            <a:pPr marL="457200" lvl="0" indent="-304800" algn="l" rtl="0">
-              <a:lnSpc>
-                <a:spcPct val="150000"/>
-              </a:lnSpc>
-              <a:spcBef>
-                <a:spcPts val="0"/>
-              </a:spcBef>
-              <a:spcAft>
-                <a:spcPts val="0"/>
-              </a:spcAft>
-              <a:buClr>
-                <a:srgbClr val="4BD0A0"/>
-              </a:buClr>
-              <a:buSzPts val="1200"/>
-              <a:buFont typeface="Proxima Nova"/>
-              <a:buChar char="●"/>
-            </a:pPr>
-            <a:r>
-              <a:rPr lang="ru-RU" sz="1100" dirty="0">
-                <a:solidFill>
-                  <a:schemeClr val="dk1"/>
-                </a:solidFill>
-                <a:latin typeface="Proxima Nova"/>
-              </a:rPr>
-              <a:t>резкий скачок продаж в 2017 году</a:t>
-            </a:r>
-          </a:p>
-          <a:p>
-            <a:pPr marL="457200" lvl="0" indent="-304800" algn="l" rtl="0">
-              <a:lnSpc>
-                <a:spcPct val="150000"/>
-              </a:lnSpc>
-              <a:spcBef>
-                <a:spcPts val="0"/>
-              </a:spcBef>
-              <a:spcAft>
-                <a:spcPts val="0"/>
-              </a:spcAft>
-              <a:buClr>
-                <a:srgbClr val="4BD0A0"/>
-              </a:buClr>
-              <a:buSzPts val="1200"/>
-              <a:buFont typeface="Proxima Nova"/>
-              <a:buChar char="●"/>
-            </a:pPr>
-            <a:r>
-              <a:rPr lang="ru-RU" sz="1100" dirty="0">
-                <a:solidFill>
-                  <a:schemeClr val="dk1"/>
-                </a:solidFill>
-                <a:latin typeface="Proxima Nova"/>
-              </a:rPr>
-              <a:t>заметно снижение объема продаж в первом квартале каждого года</a:t>
-            </a:r>
-          </a:p>
-          <a:p>
-            <a:pPr marL="457200" lvl="0" indent="-304800" algn="l" rtl="0">
-              <a:lnSpc>
-                <a:spcPct val="150000"/>
-              </a:lnSpc>
-              <a:spcBef>
-                <a:spcPts val="0"/>
-              </a:spcBef>
-              <a:spcAft>
-                <a:spcPts val="0"/>
-              </a:spcAft>
-              <a:buClr>
-                <a:srgbClr val="4BD0A0"/>
-              </a:buClr>
-              <a:buSzPts val="1200"/>
-              <a:buFont typeface="Proxima Nova"/>
-              <a:buChar char="●"/>
-            </a:pPr>
-            <a:r>
-              <a:rPr lang="en-US" sz="1100" dirty="0">
-                <a:solidFill>
-                  <a:schemeClr val="dk1"/>
-                </a:solidFill>
-                <a:latin typeface="Proxima Nova"/>
-              </a:rPr>
-              <a:t>RFM-</a:t>
-            </a:r>
-            <a:r>
-              <a:rPr lang="ru-RU" sz="1100" dirty="0">
-                <a:solidFill>
-                  <a:schemeClr val="dk1"/>
-                </a:solidFill>
-                <a:latin typeface="Proxima Nova"/>
-              </a:rPr>
-              <a:t>анализ: по объему продаж лидирует группа лояльных, по количеству клиентов лидирует группа потерянных, количество новых клиентов год от года падает</a:t>
-            </a:r>
-          </a:p>
-        </p:txBody>
-      </p:sp>
-      <p:sp>
-        <p:nvSpPr>
-          <p:cNvPr id="2" name="Google Shape;312;p49">
-            <a:extLst>
-              <a:ext uri="{FF2B5EF4-FFF2-40B4-BE49-F238E27FC236}">
-                <a16:creationId xmlns:a16="http://schemas.microsoft.com/office/drawing/2014/main" id="{0199CA67-09FE-DCB3-780A-B01BA1D99E4D}"/>
-              </a:ext>
-            </a:extLst>
-          </p:cNvPr>
-          <p:cNvSpPr txBox="1"/>
-          <p:nvPr/>
-        </p:nvSpPr>
-        <p:spPr>
-          <a:xfrm>
-            <a:off x="322550" y="746555"/>
-            <a:ext cx="7017600" cy="350250"/>
-          </a:xfrm>
-          <a:prstGeom prst="rect">
-            <a:avLst/>
-          </a:prstGeom>
-          <a:noFill/>
-          <a:ln>
-            <a:noFill/>
-          </a:ln>
-        </p:spPr>
-        <p:txBody>
-          <a:bodyPr spcFirstLastPara="1" wrap="square" lIns="45725" tIns="45725" rIns="45725" bIns="45725" numCol="1" anchor="t" anchorCtr="0">
-            <a:noAutofit/>
-          </a:bodyPr>
-          <a:lstStyle/>
-          <a:p>
-            <a:pPr marL="152400" lvl="0" algn="l" rtl="0">
-              <a:spcBef>
-                <a:spcPts val="0"/>
-              </a:spcBef>
-              <a:spcAft>
-                <a:spcPts val="0"/>
-              </a:spcAft>
-              <a:buClr>
-                <a:srgbClr val="4BD0A0"/>
-              </a:buClr>
-              <a:buSzPts val="1200"/>
-            </a:pPr>
-            <a:r>
-              <a:rPr lang="ru-RU" sz="1100" dirty="0">
-                <a:solidFill>
-                  <a:schemeClr val="dk1"/>
-                </a:solidFill>
-                <a:latin typeface="Proxima Nova"/>
-                <a:ea typeface="Proxima Nova"/>
-                <a:cs typeface="Proxima Nova"/>
-                <a:sym typeface="Proxima Nova"/>
-              </a:rPr>
-              <a:t>Выводы:</a:t>
-            </a:r>
-            <a:endParaRPr lang="ru-RU" sz="1100" dirty="0">
-              <a:solidFill>
-                <a:schemeClr val="dk1"/>
-              </a:solidFill>
-              <a:latin typeface="Proxima Nova"/>
-            </a:endParaRPr>
-          </a:p>
-        </p:txBody>
-      </p:sp>
-    </p:spTree>
-  </p:cSld>
-  <p:clrMapOvr>
-    <a:masterClrMapping/>
-  </p:clrMapOvr>
-</p:sld>
-</file>
-
-<file path=ppt/slides/slide11.xml><?xml version="1.0" encoding="utf-8"?>
-<p:sld xmlns:a="http://schemas.openxmlformats.org/drawingml/2006/main" xmlns:r="http://schemas.openxmlformats.org/officeDocument/2006/relationships" xmlns:p="http://schemas.openxmlformats.org/presentationml/2006/main">
-  <p:cSld>
-    <p:spTree>
-      <p:nvGrpSpPr>
-        <p:cNvPr id="1" name="Shape 310"/>
-        <p:cNvGrpSpPr/>
-        <p:nvPr/>
-      </p:nvGrpSpPr>
-      <p:grpSpPr>
-        <a:xfrm>
-          <a:off x="0" y="0"/>
-          <a:ext cx="0" cy="0"/>
-          <a:chOff x="0" y="0"/>
-          <a:chExt cx="0" cy="0"/>
-        </a:xfrm>
-      </p:grpSpPr>
-      <p:sp>
-        <p:nvSpPr>
-          <p:cNvPr id="311" name="Google Shape;311;p49"/>
-          <p:cNvSpPr txBox="1"/>
-          <p:nvPr/>
-        </p:nvSpPr>
-        <p:spPr>
-          <a:xfrm>
-            <a:off x="247925" y="153375"/>
-            <a:ext cx="8431800" cy="523500"/>
-          </a:xfrm>
-          <a:prstGeom prst="rect">
-            <a:avLst/>
-          </a:prstGeom>
-          <a:noFill/>
-          <a:ln>
-            <a:noFill/>
-          </a:ln>
-        </p:spPr>
-        <p:txBody>
-          <a:bodyPr spcFirstLastPara="1" wrap="square" lIns="91425" tIns="91425" rIns="91425" bIns="91425" anchor="t" anchorCtr="0">
-            <a:noAutofit/>
-          </a:bodyPr>
-          <a:lstStyle/>
-          <a:p>
-            <a:pPr marL="0" lvl="0" indent="0" algn="l" rtl="0">
-              <a:lnSpc>
-                <a:spcPct val="80000"/>
-              </a:lnSpc>
-              <a:spcBef>
-                <a:spcPts val="0"/>
-              </a:spcBef>
-              <a:spcAft>
-                <a:spcPts val="0"/>
-              </a:spcAft>
-              <a:buNone/>
-            </a:pPr>
-            <a:r>
-              <a:rPr lang="ru-RU" sz="2500">
-                <a:solidFill>
-                  <a:srgbClr val="4BD0A0"/>
-                </a:solidFill>
-                <a:latin typeface="Proxima Nova Semibold"/>
-                <a:ea typeface="Proxima Nova Semibold"/>
-                <a:cs typeface="Proxima Nova Semibold"/>
-                <a:sym typeface="Proxima Nova Semibold"/>
-              </a:rPr>
-              <a:t>Выводы и рекомендации</a:t>
-            </a:r>
-            <a:endParaRPr sz="2500">
-              <a:solidFill>
-                <a:srgbClr val="4BD0A0"/>
-              </a:solidFill>
-              <a:latin typeface="Proxima Nova Semibold"/>
-              <a:ea typeface="Proxima Nova Semibold"/>
-              <a:cs typeface="Proxima Nova Semibold"/>
-              <a:sym typeface="Proxima Nova Semibold"/>
-            </a:endParaRPr>
-          </a:p>
-        </p:txBody>
-      </p:sp>
-      <p:sp>
-        <p:nvSpPr>
-          <p:cNvPr id="312" name="Google Shape;312;p49"/>
-          <p:cNvSpPr txBox="1"/>
-          <p:nvPr/>
-        </p:nvSpPr>
-        <p:spPr>
-          <a:xfrm>
-            <a:off x="322550" y="1096805"/>
             <a:ext cx="8498900" cy="2592110"/>
           </a:xfrm>
           <a:prstGeom prst="rect">
@@ -34899,27 +33557,7 @@
                 <a:latin typeface="Proxima Nova"/>
                 <a:sym typeface="Proxima Nova"/>
               </a:rPr>
-              <a:t>запустить </a:t>
-            </a:r>
-            <a:r>
-              <a:rPr lang="ru-RU" sz="1100" dirty="0" err="1">
-                <a:solidFill>
-                  <a:schemeClr val="dk1"/>
-                </a:solidFill>
-                <a:latin typeface="Proxima Nova"/>
-                <a:sym typeface="Proxima Nova"/>
-              </a:rPr>
-              <a:t>спецакции</a:t>
-            </a:r>
-            <a:r>
-              <a:rPr lang="ru-RU" sz="1100" dirty="0">
-                <a:solidFill>
-                  <a:schemeClr val="dk1"/>
-                </a:solidFill>
-                <a:latin typeface="Proxima Nova"/>
-                <a:sym typeface="Proxima Nova"/>
-              </a:rPr>
-              <a:t> по ускоренной доставке в пиковые периоды</a:t>
+              <a:t>запустить спецакции по ускоренной доставке в пиковые периоды</a:t>
             </a:r>
           </a:p>
           <a:p>
@@ -35006,27 +33644,7 @@
                 <a:latin typeface="Proxima Nova"/>
                 <a:sym typeface="Proxima Nova"/>
               </a:rPr>
-              <a:t>запустить </a:t>
-            </a:r>
-            <a:r>
-              <a:rPr lang="ru-RU" sz="1100" dirty="0" err="1">
-                <a:solidFill>
-                  <a:schemeClr val="dk1"/>
-                </a:solidFill>
-                <a:latin typeface="Proxima Nova"/>
-                <a:sym typeface="Proxima Nova"/>
-              </a:rPr>
-              <a:t>спецакции</a:t>
-            </a:r>
-            <a:r>
-              <a:rPr lang="ru-RU" sz="1100" dirty="0">
-                <a:solidFill>
-                  <a:schemeClr val="dk1"/>
-                </a:solidFill>
-                <a:latin typeface="Proxima Nova"/>
-                <a:sym typeface="Proxima Nova"/>
-              </a:rPr>
-              <a:t> в «низкий» сезон</a:t>
+              <a:t>запустить спецакции в «низкий» сезон</a:t>
             </a:r>
           </a:p>
           <a:p>
@@ -35166,7 +33784,7 @@
 </p:sld>
 </file>
 
-<file path=ppt/slides/slide12.xml><?xml version="1.0" encoding="utf-8"?>
+<file path=ppt/slides/slide11.xml><?xml version="1.0" encoding="utf-8"?>
 <p:sld xmlns:a="http://schemas.openxmlformats.org/drawingml/2006/main" xmlns:r="http://schemas.openxmlformats.org/officeDocument/2006/relationships" xmlns:p="http://schemas.openxmlformats.org/presentationml/2006/main">
   <p:cSld>
     <p:spTree>
@@ -46442,774 +45060,6 @@
   <p:cSld>
     <p:spTree>
       <p:nvGrpSpPr>
-        <p:cNvPr id="1" name="Shape 225"/>
-        <p:cNvGrpSpPr/>
-        <p:nvPr/>
-      </p:nvGrpSpPr>
-      <p:grpSpPr>
-        <a:xfrm>
-          <a:off x="0" y="0"/>
-          <a:ext cx="0" cy="0"/>
-          <a:chOff x="0" y="0"/>
-          <a:chExt cx="0" cy="0"/>
-        </a:xfrm>
-      </p:grpSpPr>
-      <p:sp>
-        <p:nvSpPr>
-          <p:cNvPr id="229" name="Google Shape;229;p39"/>
-          <p:cNvSpPr/>
-          <p:nvPr/>
-        </p:nvSpPr>
-        <p:spPr>
-          <a:xfrm>
-            <a:off x="326136" y="307758"/>
-            <a:ext cx="4342968" cy="347371"/>
-          </a:xfrm>
-          <a:prstGeom prst="rect">
-            <a:avLst/>
-          </a:prstGeom>
-          <a:solidFill>
-            <a:srgbClr val="FFFFFF"/>
-          </a:solidFill>
-          <a:ln>
-            <a:noFill/>
-          </a:ln>
-        </p:spPr>
-        <p:txBody>
-          <a:bodyPr spcFirstLastPara="1" wrap="square" lIns="0" tIns="0" rIns="0" bIns="0" anchor="t" anchorCtr="0">
-            <a:noAutofit/>
-          </a:bodyPr>
-          <a:lstStyle/>
-          <a:p>
-            <a:pPr marL="0" marR="0" lvl="0" indent="0" algn="l" rtl="0">
-              <a:spcBef>
-                <a:spcPts val="0"/>
-              </a:spcBef>
-              <a:spcAft>
-                <a:spcPts val="0"/>
-              </a:spcAft>
-              <a:buNone/>
-            </a:pPr>
-            <a:r>
-              <a:rPr lang="ru-RU" sz="2600" b="1" i="0" u="none" strike="noStrike" cap="none" dirty="0">
-                <a:latin typeface="Proxima Nova"/>
-                <a:ea typeface="Proxima Nova"/>
-                <a:cs typeface="Proxima Nova"/>
-                <a:sym typeface="Proxima Nova"/>
-              </a:rPr>
-              <a:t>Содержание проекта</a:t>
-            </a:r>
-            <a:endParaRPr dirty="0">
-              <a:latin typeface="Proxima Nova"/>
-              <a:ea typeface="Proxima Nova"/>
-              <a:cs typeface="Proxima Nova"/>
-              <a:sym typeface="Proxima Nova"/>
-            </a:endParaRPr>
-          </a:p>
-        </p:txBody>
-      </p:sp>
-      <p:grpSp>
-        <p:nvGrpSpPr>
-          <p:cNvPr id="230" name="Google Shape;230;p39"/>
-          <p:cNvGrpSpPr/>
-          <p:nvPr/>
-        </p:nvGrpSpPr>
-        <p:grpSpPr>
-          <a:xfrm>
-            <a:off x="326136" y="1096061"/>
-            <a:ext cx="5459625" cy="374700"/>
-            <a:chOff x="285825" y="853300"/>
-            <a:chExt cx="5459625" cy="374700"/>
-          </a:xfrm>
-        </p:grpSpPr>
-        <p:sp>
-          <p:nvSpPr>
-            <p:cNvPr id="231" name="Google Shape;231;p39"/>
-            <p:cNvSpPr/>
-            <p:nvPr/>
-          </p:nvSpPr>
-          <p:spPr>
-            <a:xfrm>
-              <a:off x="923550" y="882260"/>
-              <a:ext cx="4821900" cy="316800"/>
-            </a:xfrm>
-            <a:prstGeom prst="rect">
-              <a:avLst/>
-            </a:prstGeom>
-            <a:solidFill>
-              <a:srgbClr val="FFFFFF"/>
-            </a:solidFill>
-            <a:ln>
-              <a:noFill/>
-            </a:ln>
-          </p:spPr>
-          <p:txBody>
-            <a:bodyPr spcFirstLastPara="1" wrap="square" lIns="0" tIns="0" rIns="0" bIns="0" anchor="t" anchorCtr="0">
-              <a:noAutofit/>
-            </a:bodyPr>
-            <a:lstStyle/>
-            <a:p>
-              <a:pPr marL="0" marR="0" lvl="0" indent="0" algn="l" rtl="0">
-                <a:spcBef>
-                  <a:spcPts val="0"/>
-                </a:spcBef>
-                <a:spcAft>
-                  <a:spcPts val="0"/>
-                </a:spcAft>
-                <a:buNone/>
-              </a:pPr>
-              <a:r>
-                <a:rPr lang="ru-RU" sz="1600" i="0" u="none" strike="noStrike" cap="none" dirty="0">
-                  <a:latin typeface="Proxima Nova"/>
-                  <a:ea typeface="Proxima Nova"/>
-                  <a:cs typeface="Proxima Nova"/>
-                  <a:sym typeface="Proxima Nova"/>
-                </a:rPr>
-                <a:t>Описание проекта</a:t>
-              </a:r>
-              <a:endParaRPr dirty="0">
-                <a:latin typeface="Proxima Nova"/>
-                <a:ea typeface="Proxima Nova"/>
-                <a:cs typeface="Proxima Nova"/>
-                <a:sym typeface="Proxima Nova"/>
-              </a:endParaRPr>
-            </a:p>
-            <a:p>
-              <a:pPr marL="0" marR="0" lvl="0" indent="0" algn="l" rtl="0">
-                <a:spcBef>
-                  <a:spcPts val="1330"/>
-                </a:spcBef>
-                <a:spcAft>
-                  <a:spcPts val="0"/>
-                </a:spcAft>
-                <a:buNone/>
-              </a:pPr>
-              <a:endParaRPr dirty="0">
-                <a:latin typeface="Proxima Nova"/>
-                <a:ea typeface="Proxima Nova"/>
-                <a:cs typeface="Proxima Nova"/>
-                <a:sym typeface="Proxima Nova"/>
-              </a:endParaRPr>
-            </a:p>
-          </p:txBody>
-        </p:sp>
-        <p:sp>
-          <p:nvSpPr>
-            <p:cNvPr id="232" name="Google Shape;232;p39"/>
-            <p:cNvSpPr/>
-            <p:nvPr/>
-          </p:nvSpPr>
-          <p:spPr>
-            <a:xfrm>
-              <a:off x="285825" y="853300"/>
-              <a:ext cx="374700" cy="374700"/>
-            </a:xfrm>
-            <a:prstGeom prst="ellipse">
-              <a:avLst/>
-            </a:prstGeom>
-            <a:solidFill>
-              <a:schemeClr val="lt1"/>
-            </a:solidFill>
-            <a:ln w="9525" cap="flat" cmpd="sng">
-              <a:solidFill>
-                <a:schemeClr val="dk1"/>
-              </a:solidFill>
-              <a:prstDash val="solid"/>
-              <a:round/>
-              <a:headEnd type="none" w="sm" len="sm"/>
-              <a:tailEnd type="none" w="sm" len="sm"/>
-            </a:ln>
-          </p:spPr>
-          <p:txBody>
-            <a:bodyPr spcFirstLastPara="1" wrap="square" lIns="91425" tIns="91425" rIns="91425" bIns="91425" anchor="ctr" anchorCtr="0">
-              <a:noAutofit/>
-            </a:bodyPr>
-            <a:lstStyle/>
-            <a:p>
-              <a:pPr marL="0" lvl="0" indent="0" algn="ctr" rtl="0">
-                <a:spcBef>
-                  <a:spcPts val="0"/>
-                </a:spcBef>
-                <a:spcAft>
-                  <a:spcPts val="0"/>
-                </a:spcAft>
-                <a:buNone/>
-              </a:pPr>
-              <a:r>
-                <a:rPr lang="ru-RU" b="1">
-                  <a:latin typeface="Proxima Nova"/>
-                  <a:ea typeface="Proxima Nova"/>
-                  <a:cs typeface="Proxima Nova"/>
-                  <a:sym typeface="Proxima Nova"/>
-                </a:rPr>
-                <a:t>1</a:t>
-              </a:r>
-              <a:endParaRPr b="1">
-                <a:latin typeface="Proxima Nova"/>
-                <a:ea typeface="Proxima Nova"/>
-                <a:cs typeface="Proxima Nova"/>
-                <a:sym typeface="Proxima Nova"/>
-              </a:endParaRPr>
-            </a:p>
-          </p:txBody>
-        </p:sp>
-      </p:grpSp>
-      <p:grpSp>
-        <p:nvGrpSpPr>
-          <p:cNvPr id="233" name="Google Shape;233;p39"/>
-          <p:cNvGrpSpPr/>
-          <p:nvPr/>
-        </p:nvGrpSpPr>
-        <p:grpSpPr>
-          <a:xfrm>
-            <a:off x="326136" y="1422211"/>
-            <a:ext cx="5459625" cy="498050"/>
-            <a:chOff x="285825" y="729950"/>
-            <a:chExt cx="5459625" cy="498050"/>
-          </a:xfrm>
-        </p:grpSpPr>
-        <p:sp>
-          <p:nvSpPr>
-            <p:cNvPr id="234" name="Google Shape;234;p39"/>
-            <p:cNvSpPr/>
-            <p:nvPr/>
-          </p:nvSpPr>
-          <p:spPr>
-            <a:xfrm>
-              <a:off x="923550" y="729950"/>
-              <a:ext cx="4821900" cy="489502"/>
-            </a:xfrm>
-            <a:prstGeom prst="rect">
-              <a:avLst/>
-            </a:prstGeom>
-            <a:solidFill>
-              <a:srgbClr val="FFFFFF"/>
-            </a:solidFill>
-            <a:ln>
-              <a:noFill/>
-            </a:ln>
-          </p:spPr>
-          <p:txBody>
-            <a:bodyPr spcFirstLastPara="1" wrap="square" lIns="0" tIns="0" rIns="0" bIns="0" anchor="t" anchorCtr="0">
-              <a:noAutofit/>
-            </a:bodyPr>
-            <a:lstStyle/>
-            <a:p>
-              <a:pPr marL="0" marR="0" lvl="0" indent="0" algn="l" rtl="0">
-                <a:spcBef>
-                  <a:spcPts val="1330"/>
-                </a:spcBef>
-                <a:spcAft>
-                  <a:spcPts val="0"/>
-                </a:spcAft>
-                <a:buNone/>
-              </a:pPr>
-              <a:r>
-                <a:rPr lang="ru-RU" sz="1600" dirty="0">
-                  <a:latin typeface="Proxima Nova"/>
-                  <a:ea typeface="Proxima Nova"/>
-                  <a:cs typeface="Proxima Nova"/>
-                  <a:sym typeface="Proxima Nova"/>
-                </a:rPr>
-                <a:t>Описание данных и их предобработки</a:t>
-              </a:r>
-              <a:endParaRPr dirty="0">
-                <a:latin typeface="Proxima Nova"/>
-                <a:ea typeface="Proxima Nova"/>
-                <a:cs typeface="Proxima Nova"/>
-                <a:sym typeface="Proxima Nova"/>
-              </a:endParaRPr>
-            </a:p>
-          </p:txBody>
-        </p:sp>
-        <p:sp>
-          <p:nvSpPr>
-            <p:cNvPr id="235" name="Google Shape;235;p39"/>
-            <p:cNvSpPr/>
-            <p:nvPr/>
-          </p:nvSpPr>
-          <p:spPr>
-            <a:xfrm>
-              <a:off x="285825" y="853300"/>
-              <a:ext cx="374700" cy="374700"/>
-            </a:xfrm>
-            <a:prstGeom prst="ellipse">
-              <a:avLst/>
-            </a:prstGeom>
-            <a:solidFill>
-              <a:schemeClr val="lt1"/>
-            </a:solidFill>
-            <a:ln w="9525" cap="flat" cmpd="sng">
-              <a:solidFill>
-                <a:schemeClr val="dk1"/>
-              </a:solidFill>
-              <a:prstDash val="solid"/>
-              <a:round/>
-              <a:headEnd type="none" w="sm" len="sm"/>
-              <a:tailEnd type="none" w="sm" len="sm"/>
-            </a:ln>
-          </p:spPr>
-          <p:txBody>
-            <a:bodyPr spcFirstLastPara="1" wrap="square" lIns="91425" tIns="91425" rIns="91425" bIns="91425" anchor="ctr" anchorCtr="0">
-              <a:noAutofit/>
-            </a:bodyPr>
-            <a:lstStyle/>
-            <a:p>
-              <a:pPr marL="0" lvl="0" indent="0" algn="ctr" rtl="0">
-                <a:spcBef>
-                  <a:spcPts val="0"/>
-                </a:spcBef>
-                <a:spcAft>
-                  <a:spcPts val="0"/>
-                </a:spcAft>
-                <a:buNone/>
-              </a:pPr>
-              <a:r>
-                <a:rPr lang="ru-RU" b="1">
-                  <a:latin typeface="Proxima Nova"/>
-                  <a:ea typeface="Proxima Nova"/>
-                  <a:cs typeface="Proxima Nova"/>
-                  <a:sym typeface="Proxima Nova"/>
-                </a:rPr>
-                <a:t>2</a:t>
-              </a:r>
-              <a:endParaRPr b="1">
-                <a:latin typeface="Proxima Nova"/>
-                <a:ea typeface="Proxima Nova"/>
-                <a:cs typeface="Proxima Nova"/>
-                <a:sym typeface="Proxima Nova"/>
-              </a:endParaRPr>
-            </a:p>
-          </p:txBody>
-        </p:sp>
-      </p:grpSp>
-      <p:grpSp>
-        <p:nvGrpSpPr>
-          <p:cNvPr id="236" name="Google Shape;236;p39"/>
-          <p:cNvGrpSpPr/>
-          <p:nvPr/>
-        </p:nvGrpSpPr>
-        <p:grpSpPr>
-          <a:xfrm>
-            <a:off x="326136" y="1838277"/>
-            <a:ext cx="5459625" cy="515359"/>
-            <a:chOff x="285825" y="712641"/>
-            <a:chExt cx="5459625" cy="515359"/>
-          </a:xfrm>
-        </p:grpSpPr>
-        <p:sp>
-          <p:nvSpPr>
-            <p:cNvPr id="237" name="Google Shape;237;p39"/>
-            <p:cNvSpPr/>
-            <p:nvPr/>
-          </p:nvSpPr>
-          <p:spPr>
-            <a:xfrm>
-              <a:off x="923550" y="712641"/>
-              <a:ext cx="4821900" cy="469892"/>
-            </a:xfrm>
-            <a:prstGeom prst="rect">
-              <a:avLst/>
-            </a:prstGeom>
-            <a:solidFill>
-              <a:srgbClr val="FFFFFF"/>
-            </a:solidFill>
-            <a:ln>
-              <a:noFill/>
-            </a:ln>
-          </p:spPr>
-          <p:txBody>
-            <a:bodyPr spcFirstLastPara="1" wrap="square" lIns="0" tIns="0" rIns="0" bIns="0" anchor="t" anchorCtr="0">
-              <a:noAutofit/>
-            </a:bodyPr>
-            <a:lstStyle/>
-            <a:p>
-              <a:pPr marL="0" marR="0" lvl="0" indent="0" algn="l" rtl="0">
-                <a:spcBef>
-                  <a:spcPts val="1330"/>
-                </a:spcBef>
-                <a:spcAft>
-                  <a:spcPts val="0"/>
-                </a:spcAft>
-                <a:buNone/>
-              </a:pPr>
-              <a:r>
-                <a:rPr lang="ru-RU" sz="1600" dirty="0">
-                  <a:latin typeface="Proxima Nova"/>
-                  <a:ea typeface="Proxima Nova"/>
-                  <a:cs typeface="Proxima Nova"/>
-                  <a:sym typeface="Proxima Nova"/>
-                </a:rPr>
-                <a:t>Этапы анализа</a:t>
-              </a:r>
-              <a:endParaRPr dirty="0">
-                <a:latin typeface="Proxima Nova"/>
-                <a:ea typeface="Proxima Nova"/>
-                <a:cs typeface="Proxima Nova"/>
-                <a:sym typeface="Proxima Nova"/>
-              </a:endParaRPr>
-            </a:p>
-          </p:txBody>
-        </p:sp>
-        <p:sp>
-          <p:nvSpPr>
-            <p:cNvPr id="238" name="Google Shape;238;p39"/>
-            <p:cNvSpPr/>
-            <p:nvPr/>
-          </p:nvSpPr>
-          <p:spPr>
-            <a:xfrm>
-              <a:off x="285825" y="853300"/>
-              <a:ext cx="374700" cy="374700"/>
-            </a:xfrm>
-            <a:prstGeom prst="ellipse">
-              <a:avLst/>
-            </a:prstGeom>
-            <a:solidFill>
-              <a:schemeClr val="lt1"/>
-            </a:solidFill>
-            <a:ln w="9525" cap="flat" cmpd="sng">
-              <a:solidFill>
-                <a:schemeClr val="dk1"/>
-              </a:solidFill>
-              <a:prstDash val="solid"/>
-              <a:round/>
-              <a:headEnd type="none" w="sm" len="sm"/>
-              <a:tailEnd type="none" w="sm" len="sm"/>
-            </a:ln>
-          </p:spPr>
-          <p:txBody>
-            <a:bodyPr spcFirstLastPara="1" wrap="square" lIns="91425" tIns="91425" rIns="91425" bIns="91425" anchor="ctr" anchorCtr="0">
-              <a:noAutofit/>
-            </a:bodyPr>
-            <a:lstStyle/>
-            <a:p>
-              <a:pPr marL="0" lvl="0" indent="0" algn="ctr" rtl="0">
-                <a:spcBef>
-                  <a:spcPts val="0"/>
-                </a:spcBef>
-                <a:spcAft>
-                  <a:spcPts val="0"/>
-                </a:spcAft>
-                <a:buNone/>
-              </a:pPr>
-              <a:r>
-                <a:rPr lang="ru-RU" b="1">
-                  <a:latin typeface="Proxima Nova"/>
-                  <a:ea typeface="Proxima Nova"/>
-                  <a:cs typeface="Proxima Nova"/>
-                  <a:sym typeface="Proxima Nova"/>
-                </a:rPr>
-                <a:t>3</a:t>
-              </a:r>
-              <a:endParaRPr b="1">
-                <a:latin typeface="Proxima Nova"/>
-                <a:ea typeface="Proxima Nova"/>
-                <a:cs typeface="Proxima Nova"/>
-                <a:sym typeface="Proxima Nova"/>
-              </a:endParaRPr>
-            </a:p>
-          </p:txBody>
-        </p:sp>
-      </p:grpSp>
-      <p:grpSp>
-        <p:nvGrpSpPr>
-          <p:cNvPr id="239" name="Google Shape;239;p39"/>
-          <p:cNvGrpSpPr/>
-          <p:nvPr/>
-        </p:nvGrpSpPr>
-        <p:grpSpPr>
-          <a:xfrm>
-            <a:off x="326136" y="2308168"/>
-            <a:ext cx="5459625" cy="478843"/>
-            <a:chOff x="285825" y="749157"/>
-            <a:chExt cx="5459625" cy="478843"/>
-          </a:xfrm>
-        </p:grpSpPr>
-        <p:sp>
-          <p:nvSpPr>
-            <p:cNvPr id="240" name="Google Shape;240;p39"/>
-            <p:cNvSpPr/>
-            <p:nvPr/>
-          </p:nvSpPr>
-          <p:spPr>
-            <a:xfrm>
-              <a:off x="923550" y="749157"/>
-              <a:ext cx="4821900" cy="443643"/>
-            </a:xfrm>
-            <a:prstGeom prst="rect">
-              <a:avLst/>
-            </a:prstGeom>
-            <a:solidFill>
-              <a:srgbClr val="FFFFFF"/>
-            </a:solidFill>
-            <a:ln>
-              <a:noFill/>
-            </a:ln>
-          </p:spPr>
-          <p:txBody>
-            <a:bodyPr spcFirstLastPara="1" wrap="square" lIns="0" tIns="0" rIns="0" bIns="0" anchor="t" anchorCtr="0">
-              <a:noAutofit/>
-            </a:bodyPr>
-            <a:lstStyle/>
-            <a:p>
-              <a:pPr marL="0" marR="0" lvl="0" indent="0" algn="l" rtl="0">
-                <a:spcBef>
-                  <a:spcPts val="1330"/>
-                </a:spcBef>
-                <a:spcAft>
-                  <a:spcPts val="0"/>
-                </a:spcAft>
-                <a:buNone/>
-              </a:pPr>
-              <a:r>
-                <a:rPr lang="ru-RU" sz="1600" dirty="0">
-                  <a:latin typeface="Proxima Nova"/>
-                  <a:ea typeface="Proxima Nova"/>
-                  <a:cs typeface="Proxima Nova"/>
-                  <a:sym typeface="Proxima Nova"/>
-                </a:rPr>
-                <a:t>Результаты анализа</a:t>
-              </a:r>
-              <a:endParaRPr dirty="0">
-                <a:latin typeface="Proxima Nova"/>
-                <a:ea typeface="Proxima Nova"/>
-                <a:cs typeface="Proxima Nova"/>
-                <a:sym typeface="Proxima Nova"/>
-              </a:endParaRPr>
-            </a:p>
-          </p:txBody>
-        </p:sp>
-        <p:sp>
-          <p:nvSpPr>
-            <p:cNvPr id="241" name="Google Shape;241;p39"/>
-            <p:cNvSpPr/>
-            <p:nvPr/>
-          </p:nvSpPr>
-          <p:spPr>
-            <a:xfrm>
-              <a:off x="285825" y="853300"/>
-              <a:ext cx="374700" cy="374700"/>
-            </a:xfrm>
-            <a:prstGeom prst="ellipse">
-              <a:avLst/>
-            </a:prstGeom>
-            <a:solidFill>
-              <a:schemeClr val="lt1"/>
-            </a:solidFill>
-            <a:ln w="9525" cap="flat" cmpd="sng">
-              <a:solidFill>
-                <a:schemeClr val="dk1"/>
-              </a:solidFill>
-              <a:prstDash val="solid"/>
-              <a:round/>
-              <a:headEnd type="none" w="sm" len="sm"/>
-              <a:tailEnd type="none" w="sm" len="sm"/>
-            </a:ln>
-          </p:spPr>
-          <p:txBody>
-            <a:bodyPr spcFirstLastPara="1" wrap="square" lIns="91425" tIns="91425" rIns="91425" bIns="91425" anchor="ctr" anchorCtr="0">
-              <a:noAutofit/>
-            </a:bodyPr>
-            <a:lstStyle/>
-            <a:p>
-              <a:pPr marL="0" lvl="0" indent="0" algn="ctr" rtl="0">
-                <a:spcBef>
-                  <a:spcPts val="0"/>
-                </a:spcBef>
-                <a:spcAft>
-                  <a:spcPts val="0"/>
-                </a:spcAft>
-                <a:buNone/>
-              </a:pPr>
-              <a:r>
-                <a:rPr lang="ru-RU" b="1">
-                  <a:latin typeface="Proxima Nova"/>
-                  <a:ea typeface="Proxima Nova"/>
-                  <a:cs typeface="Proxima Nova"/>
-                  <a:sym typeface="Proxima Nova"/>
-                </a:rPr>
-                <a:t>4</a:t>
-              </a:r>
-              <a:endParaRPr b="1">
-                <a:latin typeface="Proxima Nova"/>
-                <a:ea typeface="Proxima Nova"/>
-                <a:cs typeface="Proxima Nova"/>
-                <a:sym typeface="Proxima Nova"/>
-              </a:endParaRPr>
-            </a:p>
-          </p:txBody>
-        </p:sp>
-      </p:grpSp>
-      <p:grpSp>
-        <p:nvGrpSpPr>
-          <p:cNvPr id="242" name="Google Shape;242;p39"/>
-          <p:cNvGrpSpPr/>
-          <p:nvPr/>
-        </p:nvGrpSpPr>
-        <p:grpSpPr>
-          <a:xfrm>
-            <a:off x="326136" y="2751812"/>
-            <a:ext cx="5459625" cy="468574"/>
-            <a:chOff x="285825" y="759426"/>
-            <a:chExt cx="5459625" cy="468574"/>
-          </a:xfrm>
-        </p:grpSpPr>
-        <p:sp>
-          <p:nvSpPr>
-            <p:cNvPr id="243" name="Google Shape;243;p39"/>
-            <p:cNvSpPr/>
-            <p:nvPr/>
-          </p:nvSpPr>
-          <p:spPr>
-            <a:xfrm>
-              <a:off x="923550" y="759426"/>
-              <a:ext cx="4821900" cy="468574"/>
-            </a:xfrm>
-            <a:prstGeom prst="rect">
-              <a:avLst/>
-            </a:prstGeom>
-            <a:solidFill>
-              <a:srgbClr val="FFFFFF"/>
-            </a:solidFill>
-            <a:ln>
-              <a:noFill/>
-            </a:ln>
-          </p:spPr>
-          <p:txBody>
-            <a:bodyPr spcFirstLastPara="1" wrap="square" lIns="0" tIns="0" rIns="0" bIns="0" anchor="t" anchorCtr="0">
-              <a:noAutofit/>
-            </a:bodyPr>
-            <a:lstStyle/>
-            <a:p>
-              <a:pPr marL="0" lvl="0" indent="0" algn="l" rtl="0">
-                <a:spcBef>
-                  <a:spcPts val="1330"/>
-                </a:spcBef>
-                <a:spcAft>
-                  <a:spcPts val="0"/>
-                </a:spcAft>
-                <a:buClr>
-                  <a:schemeClr val="dk1"/>
-                </a:buClr>
-                <a:buFont typeface="Arial"/>
-                <a:buNone/>
-              </a:pPr>
-              <a:r>
-                <a:rPr lang="ru-RU" sz="1600" dirty="0">
-                  <a:solidFill>
-                    <a:schemeClr val="dk1"/>
-                  </a:solidFill>
-                  <a:latin typeface="Proxima Nova"/>
-                  <a:ea typeface="Proxima Nova"/>
-                  <a:cs typeface="Proxima Nova"/>
-                  <a:sym typeface="Proxima Nova"/>
-                </a:rPr>
-                <a:t>Выводы и рекомендации</a:t>
-              </a:r>
-              <a:endParaRPr dirty="0">
-                <a:solidFill>
-                  <a:schemeClr val="dk1"/>
-                </a:solidFill>
-                <a:latin typeface="Proxima Nova"/>
-                <a:ea typeface="Proxima Nova"/>
-                <a:cs typeface="Proxima Nova"/>
-                <a:sym typeface="Proxima Nova"/>
-              </a:endParaRPr>
-            </a:p>
-            <a:p>
-              <a:pPr marL="0" marR="0" lvl="0" indent="0" algn="l" rtl="0">
-                <a:spcBef>
-                  <a:spcPts val="1330"/>
-                </a:spcBef>
-                <a:spcAft>
-                  <a:spcPts val="0"/>
-                </a:spcAft>
-                <a:buNone/>
-              </a:pPr>
-              <a:endParaRPr sz="1600" dirty="0">
-                <a:latin typeface="Proxima Nova"/>
-                <a:ea typeface="Proxima Nova"/>
-                <a:cs typeface="Proxima Nova"/>
-                <a:sym typeface="Proxima Nova"/>
-              </a:endParaRPr>
-            </a:p>
-          </p:txBody>
-        </p:sp>
-        <p:sp>
-          <p:nvSpPr>
-            <p:cNvPr id="244" name="Google Shape;244;p39"/>
-            <p:cNvSpPr/>
-            <p:nvPr/>
-          </p:nvSpPr>
-          <p:spPr>
-            <a:xfrm>
-              <a:off x="285825" y="853300"/>
-              <a:ext cx="374700" cy="374700"/>
-            </a:xfrm>
-            <a:prstGeom prst="ellipse">
-              <a:avLst/>
-            </a:prstGeom>
-            <a:solidFill>
-              <a:schemeClr val="lt1"/>
-            </a:solidFill>
-            <a:ln w="9525" cap="flat" cmpd="sng">
-              <a:solidFill>
-                <a:schemeClr val="dk1"/>
-              </a:solidFill>
-              <a:prstDash val="solid"/>
-              <a:round/>
-              <a:headEnd type="none" w="sm" len="sm"/>
-              <a:tailEnd type="none" w="sm" len="sm"/>
-            </a:ln>
-          </p:spPr>
-          <p:txBody>
-            <a:bodyPr spcFirstLastPara="1" wrap="square" lIns="91425" tIns="91425" rIns="91425" bIns="91425" anchor="ctr" anchorCtr="0">
-              <a:noAutofit/>
-            </a:bodyPr>
-            <a:lstStyle/>
-            <a:p>
-              <a:pPr marL="0" lvl="0" indent="0" algn="ctr" rtl="0">
-                <a:spcBef>
-                  <a:spcPts val="0"/>
-                </a:spcBef>
-                <a:spcAft>
-                  <a:spcPts val="0"/>
-                </a:spcAft>
-                <a:buNone/>
-              </a:pPr>
-              <a:r>
-                <a:rPr lang="ru-RU" b="1">
-                  <a:latin typeface="Proxima Nova"/>
-                  <a:ea typeface="Proxima Nova"/>
-                  <a:cs typeface="Proxima Nova"/>
-                  <a:sym typeface="Proxima Nova"/>
-                </a:rPr>
-                <a:t>5</a:t>
-              </a:r>
-              <a:endParaRPr b="1">
-                <a:latin typeface="Proxima Nova"/>
-                <a:ea typeface="Proxima Nova"/>
-                <a:cs typeface="Proxima Nova"/>
-                <a:sym typeface="Proxima Nova"/>
-              </a:endParaRPr>
-            </a:p>
-          </p:txBody>
-        </p:sp>
-      </p:grpSp>
-    </p:spTree>
-  </p:cSld>
-  <p:clrMapOvr>
-    <a:masterClrMapping/>
-  </p:clrMapOvr>
-</p:sld>
-</file>
-
-<file path=ppt/slides/slide3.xml><?xml version="1.0" encoding="utf-8"?>
-<p:sld xmlns:a="http://schemas.openxmlformats.org/drawingml/2006/main" xmlns:r="http://schemas.openxmlformats.org/officeDocument/2006/relationships" xmlns:p="http://schemas.openxmlformats.org/presentationml/2006/main">
-  <p:cSld>
-    <p:spTree>
-      <p:nvGrpSpPr>
         <p:cNvPr id="1" name="Shape 258"/>
         <p:cNvGrpSpPr/>
         <p:nvPr/>
@@ -47510,18 +45360,6 @@
               <a:t>FM-</a:t>
             </a:r>
             <a:r>
-              <a:rPr lang="en-US" sz="1100" dirty="0" err="1">
-                <a:solidFill>
-                  <a:schemeClr val="dk1"/>
-                </a:solidFill>
-                <a:latin typeface="Proxima Nova"/>
-                <a:ea typeface="Proxima Nova"/>
-                <a:cs typeface="Proxima Nova"/>
-                <a:sym typeface="Proxima Nova"/>
-              </a:rPr>
-              <a:t>а</a:t>
-            </a:r>
-            <a:r>
               <a:rPr lang="ru-RU" sz="1100" dirty="0">
                 <a:solidFill>
                   <a:schemeClr val="dk1"/>
@@ -47531,7 +45369,7 @@
                 <a:cs typeface="Proxima Nova"/>
                 <a:sym typeface="Proxima Nova"/>
               </a:rPr>
-              <a:t>нализ)</a:t>
+              <a:t>анализ)</a:t>
             </a:r>
             <a:endParaRPr sz="1100" dirty="0">
               <a:solidFill>
@@ -47754,7 +45592,7 @@
 </p:sld>
 </file>
 
-<file path=ppt/slides/slide4.xml><?xml version="1.0" encoding="utf-8"?>
+<file path=ppt/slides/slide3.xml><?xml version="1.0" encoding="utf-8"?>
 <p:sld xmlns:a="http://schemas.openxmlformats.org/drawingml/2006/main" xmlns:r="http://schemas.openxmlformats.org/officeDocument/2006/relationships" xmlns:p="http://schemas.openxmlformats.org/presentationml/2006/main">
   <p:cSld>
     <p:spTree>
@@ -48278,7 +46116,7 @@
 </p:sld>
 </file>
 
-<file path=ppt/slides/slide5.xml><?xml version="1.0" encoding="utf-8"?>
+<file path=ppt/slides/slide4.xml><?xml version="1.0" encoding="utf-8"?>
 <p:sld xmlns:a="http://schemas.openxmlformats.org/drawingml/2006/main" xmlns:r="http://schemas.openxmlformats.org/officeDocument/2006/relationships" xmlns:p="http://schemas.openxmlformats.org/presentationml/2006/main">
   <p:cSld>
     <p:spTree>
@@ -48394,18 +46232,6 @@
               <a:buSzPts val="1200"/>
             </a:pPr>
             <a:r>
-              <a:rPr lang="ru-RU" sz="1100" dirty="0" err="1">
-                <a:solidFill>
-                  <a:schemeClr val="dk1"/>
-                </a:solidFill>
-                <a:latin typeface="Proxima Nova"/>
-                <a:ea typeface="Proxima Nova"/>
-                <a:cs typeface="Proxima Nova"/>
-                <a:sym typeface="Proxima Nova"/>
-              </a:rPr>
-              <a:t>Датасет</a:t>
-            </a:r>
-            <a:r>
               <a:rPr lang="ru-RU" sz="1100" dirty="0">
                 <a:solidFill>
                   <a:schemeClr val="dk1"/>
@@ -48415,7 +46241,7 @@
                 <a:cs typeface="Proxima Nova"/>
                 <a:sym typeface="Proxima Nova"/>
               </a:rPr>
-              <a:t> «</a:t>
+              <a:t>Датасет «</a:t>
             </a:r>
             <a:r>
               <a:rPr lang="en-US" sz="1100" dirty="0">
@@ -48672,7 +46498,7 @@
             </a:endParaRPr>
           </a:p>
           <a:p>
-            <a:pPr marL="457200" lvl="0" indent="-304800" algn="just" rtl="0">
+            <a:pPr marL="457200" lvl="0" indent="-304800" rtl="0">
               <a:spcBef>
                 <a:spcPts val="840"/>
               </a:spcBef>
@@ -48844,7 +46670,7 @@
             </a:endParaRPr>
           </a:p>
           <a:p>
-            <a:pPr marL="457200" lvl="0" indent="-304800" algn="just" rtl="0">
+            <a:pPr marL="457200" lvl="0" indent="-304800" rtl="0">
               <a:spcBef>
                 <a:spcPts val="840"/>
               </a:spcBef>
@@ -48937,7 +46763,7 @@
 </p:sld>
 </file>
 
-<file path=ppt/slides/slide6.xml><?xml version="1.0" encoding="utf-8"?>
+<file path=ppt/slides/slide5.xml><?xml version="1.0" encoding="utf-8"?>
 <p:sld xmlns:a="http://schemas.openxmlformats.org/drawingml/2006/main" xmlns:r="http://schemas.openxmlformats.org/officeDocument/2006/relationships" xmlns:p="http://schemas.openxmlformats.org/presentationml/2006/main">
   <p:cSld>
     <p:spTree>
@@ -49348,6 +47174,154 @@
 </p:sld>
 </file>
 
+<file path=ppt/slides/slide6.xml><?xml version="1.0" encoding="utf-8"?>
+<p:sld xmlns:a="http://schemas.openxmlformats.org/drawingml/2006/main" xmlns:r="http://schemas.openxmlformats.org/officeDocument/2006/relationships" xmlns:p="http://schemas.openxmlformats.org/presentationml/2006/main">
+  <p:cSld>
+    <p:spTree>
+      <p:nvGrpSpPr>
+        <p:cNvPr id="1" name="Shape 297"/>
+        <p:cNvGrpSpPr/>
+        <p:nvPr/>
+      </p:nvGrpSpPr>
+      <p:grpSpPr>
+        <a:xfrm>
+          <a:off x="0" y="0"/>
+          <a:ext cx="0" cy="0"/>
+          <a:chOff x="0" y="0"/>
+          <a:chExt cx="0" cy="0"/>
+        </a:xfrm>
+      </p:grpSpPr>
+      <p:sp>
+        <p:nvSpPr>
+          <p:cNvPr id="298" name="Google Shape;298;p47"/>
+          <p:cNvSpPr txBox="1"/>
+          <p:nvPr/>
+        </p:nvSpPr>
+        <p:spPr>
+          <a:xfrm>
+            <a:off x="247925" y="153375"/>
+            <a:ext cx="8431800" cy="523500"/>
+          </a:xfrm>
+          <a:prstGeom prst="rect">
+            <a:avLst/>
+          </a:prstGeom>
+          <a:noFill/>
+          <a:ln>
+            <a:noFill/>
+          </a:ln>
+        </p:spPr>
+        <p:txBody>
+          <a:bodyPr spcFirstLastPara="1" wrap="square" lIns="91425" tIns="91425" rIns="91425" bIns="91425" anchor="t" anchorCtr="0">
+            <a:noAutofit/>
+          </a:bodyPr>
+          <a:lstStyle/>
+          <a:p>
+            <a:pPr marL="0" lvl="0" indent="0" algn="l" rtl="0">
+              <a:lnSpc>
+                <a:spcPct val="80000"/>
+              </a:lnSpc>
+              <a:spcBef>
+                <a:spcPts val="0"/>
+              </a:spcBef>
+              <a:spcAft>
+                <a:spcPts val="0"/>
+              </a:spcAft>
+              <a:buNone/>
+            </a:pPr>
+            <a:r>
+              <a:rPr lang="ru-RU" sz="2500" dirty="0">
+                <a:solidFill>
+                  <a:srgbClr val="4BD0A0"/>
+                </a:solidFill>
+                <a:latin typeface="Proxima Nova Semibold"/>
+                <a:ea typeface="Proxima Nova Semibold"/>
+                <a:cs typeface="Proxima Nova Semibold"/>
+                <a:sym typeface="Proxima Nova Semibold"/>
+              </a:rPr>
+              <a:t>Структура решения</a:t>
+            </a:r>
+            <a:endParaRPr sz="2500" dirty="0">
+              <a:solidFill>
+                <a:srgbClr val="4BD0A0"/>
+              </a:solidFill>
+              <a:latin typeface="Proxima Nova Semibold"/>
+              <a:ea typeface="Proxima Nova Semibold"/>
+              <a:cs typeface="Proxima Nova Semibold"/>
+              <a:sym typeface="Proxima Nova Semibold"/>
+            </a:endParaRPr>
+          </a:p>
+        </p:txBody>
+      </p:sp>
+      <p:sp>
+        <p:nvSpPr>
+          <p:cNvPr id="2" name="Прямоугольник 1">
+            <a:extLst>
+              <a:ext uri="{FF2B5EF4-FFF2-40B4-BE49-F238E27FC236}">
+                <a16:creationId xmlns:a16="http://schemas.microsoft.com/office/drawing/2014/main" id="{3DE3DFE9-6ADC-42C5-50D6-093F832F9E2D}"/>
+              </a:ext>
+            </a:extLst>
+          </p:cNvPr>
+          <p:cNvSpPr/>
+          <p:nvPr/>
+        </p:nvSpPr>
+        <p:spPr>
+          <a:xfrm>
+            <a:off x="247925" y="676875"/>
+            <a:ext cx="8134075" cy="4104675"/>
+          </a:xfrm>
+          <a:prstGeom prst="rect">
+            <a:avLst/>
+          </a:prstGeom>
+          <a:blipFill dpi="0" rotWithShape="1">
+            <a:blip r:embed="rId3">
+              <a:extLst>
+                <a:ext uri="{28A0092B-C50C-407E-A947-70E740481C1C}">
+                  <a14:useLocalDpi xmlns:a14="http://schemas.microsoft.com/office/drawing/2010/main" val="0"/>
+                </a:ext>
+              </a:extLst>
+            </a:blip>
+            <a:srcRect/>
+            <a:stretch>
+              <a:fillRect l="5001" r="5001"/>
+            </a:stretch>
+          </a:blipFill>
+          <a:ln>
+            <a:noFill/>
+          </a:ln>
+        </p:spPr>
+        <p:style>
+          <a:lnRef idx="2">
+            <a:schemeClr val="accent1">
+              <a:shade val="15000"/>
+            </a:schemeClr>
+          </a:lnRef>
+          <a:fillRef idx="1">
+            <a:schemeClr val="accent1"/>
+          </a:fillRef>
+          <a:effectRef idx="0">
+            <a:schemeClr val="accent1"/>
+          </a:effectRef>
+          <a:fontRef idx="minor">
+            <a:schemeClr val="lt1"/>
+          </a:fontRef>
+        </p:style>
+        <p:txBody>
+          <a:bodyPr rtlCol="0" anchor="ctr"/>
+          <a:lstStyle/>
+          <a:p>
+            <a:pPr algn="ctr"/>
+            <a:endParaRPr lang="ru-RU"/>
+          </a:p>
+        </p:txBody>
+      </p:sp>
+    </p:spTree>
+  </p:cSld>
+  <p:clrMapOvr>
+    <a:masterClrMapping/>
+  </p:clrMapOvr>
+</p:sld>
+</file>
+
 <file path=ppt/slides/slide7.xml><?xml version="1.0" encoding="utf-8"?>
 <p:sld xmlns:a="http://schemas.openxmlformats.org/drawingml/2006/main" xmlns:r="http://schemas.openxmlformats.org/officeDocument/2006/relationships" xmlns:p="http://schemas.openxmlformats.org/presentationml/2006/main">
   <p:cSld>
@@ -49412,7 +47386,7 @@
                 <a:cs typeface="Proxima Nova Semibold"/>
                 <a:sym typeface="Proxima Nova Semibold"/>
               </a:rPr>
-              <a:t>Результаты анализа</a:t>
+              <a:t>Структура решения</a:t>
             </a:r>
             <a:endParaRPr sz="2500" dirty="0">
               <a:solidFill>
@@ -49440,8 +47414,8 @@
         </p:nvSpPr>
         <p:spPr>
           <a:xfrm>
-            <a:off x="247925" y="1052186"/>
-            <a:ext cx="5673219" cy="3149999"/>
+            <a:off x="247925" y="676875"/>
+            <a:ext cx="8134075" cy="4104675"/>
           </a:xfrm>
           <a:prstGeom prst="rect">
             <a:avLst/>
@@ -49456,7 +47430,7 @@
             </a:blip>
             <a:srcRect/>
             <a:stretch>
-              <a:fillRect t="-492" b="-492"/>
+              <a:fillRect l="4837" r="4837"/>
             </a:stretch>
           </a:blipFill>
           <a:ln>
@@ -49488,446 +47462,12 @@
           </a:p>
         </p:txBody>
       </p:sp>
-      <p:sp>
-        <p:nvSpPr>
-          <p:cNvPr id="3" name="Google Shape;299;p47">
-            <a:extLst>
-              <a:ext uri="{FF2B5EF4-FFF2-40B4-BE49-F238E27FC236}">
-                <a16:creationId xmlns:a16="http://schemas.microsoft.com/office/drawing/2014/main" id="{F9C23164-2979-3DA4-83BD-B772ED7BDF79}"/>
-              </a:ext>
-            </a:extLst>
-          </p:cNvPr>
-          <p:cNvSpPr txBox="1"/>
-          <p:nvPr/>
-        </p:nvSpPr>
-        <p:spPr>
-          <a:xfrm>
-            <a:off x="5921144" y="1235206"/>
-            <a:ext cx="2758581" cy="753108"/>
-          </a:xfrm>
-          <a:prstGeom prst="rect">
-            <a:avLst/>
-          </a:prstGeom>
-          <a:noFill/>
-          <a:ln>
-            <a:noFill/>
-          </a:ln>
-        </p:spPr>
-        <p:txBody>
-          <a:bodyPr spcFirstLastPara="1" wrap="square" lIns="45725" tIns="45725" rIns="45725" bIns="45725" numCol="2" anchor="t" anchorCtr="0">
-            <a:noAutofit/>
-          </a:bodyPr>
-          <a:lstStyle/>
-          <a:p>
-            <a:pPr marL="457200" lvl="0" indent="-304800" algn="l" rtl="0">
-              <a:lnSpc>
-                <a:spcPct val="119000"/>
-              </a:lnSpc>
-              <a:spcBef>
-                <a:spcPts val="0"/>
-              </a:spcBef>
-              <a:spcAft>
-                <a:spcPts val="0"/>
-              </a:spcAft>
-              <a:buClr>
-                <a:srgbClr val="4BD0A0"/>
-              </a:buClr>
-              <a:buSzPts val="1200"/>
-              <a:buFont typeface="Proxima Nova"/>
-              <a:buChar char="●"/>
-            </a:pPr>
-            <a:r>
-              <a:rPr lang="ru-RU" sz="1100" dirty="0">
-                <a:solidFill>
-                  <a:schemeClr val="dk1"/>
-                </a:solidFill>
-                <a:latin typeface="Proxima Nova"/>
-                <a:ea typeface="Proxima Nova"/>
-                <a:cs typeface="Proxima Nova"/>
-                <a:sym typeface="Proxima Nova"/>
-              </a:rPr>
-              <a:t>ключевые показатели</a:t>
-            </a:r>
-          </a:p>
-          <a:p>
-            <a:pPr marL="457200" lvl="0" indent="-304800" algn="l" rtl="0">
-              <a:lnSpc>
-                <a:spcPct val="119000"/>
-              </a:lnSpc>
-              <a:spcBef>
-                <a:spcPts val="0"/>
-              </a:spcBef>
-              <a:spcAft>
-                <a:spcPts val="0"/>
-              </a:spcAft>
-              <a:buClr>
-                <a:srgbClr val="4BD0A0"/>
-              </a:buClr>
-              <a:buSzPts val="1200"/>
-              <a:buFont typeface="Proxima Nova"/>
-              <a:buChar char="●"/>
-            </a:pPr>
-            <a:r>
-              <a:rPr lang="ru-RU" sz="1100" dirty="0">
-                <a:solidFill>
-                  <a:schemeClr val="dk1"/>
-                </a:solidFill>
-                <a:latin typeface="Proxima Nova"/>
-                <a:ea typeface="Proxima Nova"/>
-                <a:cs typeface="Proxima Nova"/>
-                <a:sym typeface="Proxima Nova"/>
-              </a:rPr>
-              <a:t>диаграммы</a:t>
-            </a:r>
-          </a:p>
-          <a:p>
-            <a:pPr marL="457200" lvl="0" indent="-304800" algn="l" rtl="0">
-              <a:lnSpc>
-                <a:spcPct val="119000"/>
-              </a:lnSpc>
-              <a:spcBef>
-                <a:spcPts val="0"/>
-              </a:spcBef>
-              <a:spcAft>
-                <a:spcPts val="0"/>
-              </a:spcAft>
-              <a:buClr>
-                <a:srgbClr val="4BD0A0"/>
-              </a:buClr>
-              <a:buSzPts val="1200"/>
-              <a:buFont typeface="Proxima Nova"/>
-              <a:buChar char="●"/>
-            </a:pPr>
-            <a:r>
-              <a:rPr lang="ru-RU" sz="1100" dirty="0">
-                <a:solidFill>
-                  <a:schemeClr val="dk1"/>
-                </a:solidFill>
-                <a:latin typeface="Proxima Nova"/>
-                <a:ea typeface="Proxima Nova"/>
-                <a:cs typeface="Proxima Nova"/>
-                <a:sym typeface="Proxima Nova"/>
-              </a:rPr>
-              <a:t>фильтры</a:t>
-            </a:r>
-          </a:p>
-          <a:p>
-            <a:pPr marL="457200" lvl="0" indent="-304800" algn="l" rtl="0">
-              <a:lnSpc>
-                <a:spcPct val="119000"/>
-              </a:lnSpc>
-              <a:spcBef>
-                <a:spcPts val="0"/>
-              </a:spcBef>
-              <a:spcAft>
-                <a:spcPts val="0"/>
-              </a:spcAft>
-              <a:buClr>
-                <a:srgbClr val="4BD0A0"/>
-              </a:buClr>
-              <a:buSzPts val="1200"/>
-              <a:buFont typeface="Proxima Nova"/>
-              <a:buChar char="●"/>
-            </a:pPr>
-            <a:r>
-              <a:rPr lang="ru-RU" sz="1100" dirty="0" err="1">
-                <a:solidFill>
-                  <a:schemeClr val="dk1"/>
-                </a:solidFill>
-                <a:latin typeface="Proxima Nova"/>
-                <a:ea typeface="Proxima Nova"/>
-                <a:cs typeface="Proxima Nova"/>
-                <a:sym typeface="Proxima Nova"/>
-              </a:rPr>
-              <a:t>тултипы</a:t>
-            </a:r>
-            <a:endParaRPr lang="ru-RU" sz="1100" dirty="0">
-              <a:solidFill>
-                <a:schemeClr val="dk1"/>
-              </a:solidFill>
-              <a:latin typeface="Proxima Nova"/>
-              <a:ea typeface="Proxima Nova"/>
-              <a:cs typeface="Proxima Nova"/>
-              <a:sym typeface="Proxima Nova"/>
-            </a:endParaRPr>
-          </a:p>
-          <a:p>
-            <a:pPr marL="457200" lvl="0" indent="-304800" algn="l" rtl="0">
-              <a:lnSpc>
-                <a:spcPct val="119000"/>
-              </a:lnSpc>
-              <a:spcBef>
-                <a:spcPts val="0"/>
-              </a:spcBef>
-              <a:spcAft>
-                <a:spcPts val="0"/>
-              </a:spcAft>
-              <a:buClr>
-                <a:srgbClr val="4BD0A0"/>
-              </a:buClr>
-              <a:buSzPts val="1200"/>
-              <a:buFont typeface="Proxima Nova"/>
-              <a:buChar char="●"/>
-            </a:pPr>
-            <a:r>
-              <a:rPr lang="ru-RU" sz="1100" dirty="0">
-                <a:solidFill>
-                  <a:schemeClr val="dk1"/>
-                </a:solidFill>
-                <a:latin typeface="Proxima Nova"/>
-                <a:ea typeface="Proxima Nova"/>
-                <a:cs typeface="Proxima Nova"/>
-                <a:sym typeface="Proxima Nova"/>
-              </a:rPr>
-              <a:t>кнопки</a:t>
-            </a:r>
-            <a:endParaRPr sz="1100" dirty="0">
-              <a:solidFill>
-                <a:schemeClr val="dk1"/>
-              </a:solidFill>
-              <a:latin typeface="Proxima Nova"/>
-              <a:ea typeface="Proxima Nova"/>
-              <a:cs typeface="Proxima Nova"/>
-              <a:sym typeface="Proxima Nova"/>
-            </a:endParaRPr>
-          </a:p>
-        </p:txBody>
-      </p:sp>
-      <p:sp>
-        <p:nvSpPr>
-          <p:cNvPr id="4" name="Google Shape;299;p47">
-            <a:extLst>
-              <a:ext uri="{FF2B5EF4-FFF2-40B4-BE49-F238E27FC236}">
-                <a16:creationId xmlns:a16="http://schemas.microsoft.com/office/drawing/2014/main" id="{B7B29492-9692-53B1-0E82-7047832101F0}"/>
-              </a:ext>
-            </a:extLst>
-          </p:cNvPr>
-          <p:cNvSpPr txBox="1"/>
-          <p:nvPr/>
-        </p:nvSpPr>
-        <p:spPr>
-          <a:xfrm>
-            <a:off x="5921144" y="941314"/>
-            <a:ext cx="2758581" cy="293892"/>
-          </a:xfrm>
-          <a:prstGeom prst="rect">
-            <a:avLst/>
-          </a:prstGeom>
-          <a:noFill/>
-          <a:ln>
-            <a:noFill/>
-          </a:ln>
-        </p:spPr>
-        <p:txBody>
-          <a:bodyPr spcFirstLastPara="1" wrap="square" lIns="45725" tIns="45725" rIns="45725" bIns="45725" numCol="1" anchor="t" anchorCtr="0">
-            <a:noAutofit/>
-          </a:bodyPr>
-          <a:lstStyle/>
-          <a:p>
-            <a:pPr marL="152400" lvl="0" algn="l" rtl="0">
-              <a:lnSpc>
-                <a:spcPct val="119000"/>
-              </a:lnSpc>
-              <a:spcBef>
-                <a:spcPts val="0"/>
-              </a:spcBef>
-              <a:spcAft>
-                <a:spcPts val="0"/>
-              </a:spcAft>
-              <a:buClr>
-                <a:srgbClr val="4BD0A0"/>
-              </a:buClr>
-              <a:buSzPts val="1200"/>
-            </a:pPr>
-            <a:r>
-              <a:rPr lang="ru-RU" sz="1100" dirty="0">
-                <a:solidFill>
-                  <a:schemeClr val="dk1"/>
-                </a:solidFill>
-                <a:latin typeface="Proxima Nova"/>
-                <a:ea typeface="Proxima Nova"/>
-                <a:cs typeface="Proxima Nova"/>
-                <a:sym typeface="Proxima Nova"/>
-              </a:rPr>
-              <a:t>Элементы диаграммы:</a:t>
-            </a:r>
-            <a:endParaRPr sz="1100" dirty="0">
-              <a:solidFill>
-                <a:schemeClr val="dk1"/>
-              </a:solidFill>
-              <a:latin typeface="Proxima Nova"/>
-              <a:ea typeface="Proxima Nova"/>
-              <a:cs typeface="Proxima Nova"/>
-              <a:sym typeface="Proxima Nova"/>
-            </a:endParaRPr>
-          </a:p>
-        </p:txBody>
-      </p:sp>
-      <p:sp>
-        <p:nvSpPr>
-          <p:cNvPr id="5" name="Google Shape;299;p47">
-            <a:extLst>
-              <a:ext uri="{FF2B5EF4-FFF2-40B4-BE49-F238E27FC236}">
-                <a16:creationId xmlns:a16="http://schemas.microsoft.com/office/drawing/2014/main" id="{CDCCF1C4-587B-D19A-B434-00E3E8AA0F17}"/>
-              </a:ext>
-            </a:extLst>
-          </p:cNvPr>
-          <p:cNvSpPr txBox="1"/>
-          <p:nvPr/>
-        </p:nvSpPr>
-        <p:spPr>
-          <a:xfrm>
-            <a:off x="5921144" y="2398392"/>
-            <a:ext cx="2758581" cy="1099822"/>
-          </a:xfrm>
-          <a:prstGeom prst="rect">
-            <a:avLst/>
-          </a:prstGeom>
-          <a:noFill/>
-          <a:ln>
-            <a:noFill/>
-          </a:ln>
-        </p:spPr>
-        <p:txBody>
-          <a:bodyPr spcFirstLastPara="1" wrap="square" lIns="45725" tIns="45725" rIns="45725" bIns="45725" numCol="1" anchor="t" anchorCtr="0">
-            <a:noAutofit/>
-          </a:bodyPr>
-          <a:lstStyle/>
-          <a:p>
-            <a:pPr marL="457200" lvl="0" indent="-304800" algn="l" rtl="0">
-              <a:lnSpc>
-                <a:spcPct val="119000"/>
-              </a:lnSpc>
-              <a:spcBef>
-                <a:spcPts val="0"/>
-              </a:spcBef>
-              <a:spcAft>
-                <a:spcPts val="0"/>
-              </a:spcAft>
-              <a:buClr>
-                <a:srgbClr val="4BD0A0"/>
-              </a:buClr>
-              <a:buSzPts val="1200"/>
-              <a:buFont typeface="Proxima Nova"/>
-              <a:buChar char="●"/>
-            </a:pPr>
-            <a:r>
-              <a:rPr lang="ru-RU" sz="1100" dirty="0">
-                <a:solidFill>
-                  <a:schemeClr val="dk1"/>
-                </a:solidFill>
-                <a:latin typeface="Proxima Nova"/>
-                <a:ea typeface="Proxima Nova"/>
-                <a:cs typeface="Proxima Nova"/>
-                <a:sym typeface="Proxima Nova"/>
-              </a:rPr>
-              <a:t>все элементы в диаграммах могут быть фильтрами для других диаграмм на листе </a:t>
-            </a:r>
-          </a:p>
-          <a:p>
-            <a:pPr marL="457200" lvl="0" indent="-304800" algn="l" rtl="0">
-              <a:lnSpc>
-                <a:spcPct val="119000"/>
-              </a:lnSpc>
-              <a:spcBef>
-                <a:spcPts val="0"/>
-              </a:spcBef>
-              <a:spcAft>
-                <a:spcPts val="0"/>
-              </a:spcAft>
-              <a:buClr>
-                <a:srgbClr val="4BD0A0"/>
-              </a:buClr>
-              <a:buSzPts val="1200"/>
-              <a:buFont typeface="Proxima Nova"/>
-              <a:buChar char="●"/>
-            </a:pPr>
-            <a:r>
-              <a:rPr lang="ru-RU" sz="1100" dirty="0">
-                <a:solidFill>
-                  <a:schemeClr val="dk1"/>
-                </a:solidFill>
-                <a:latin typeface="Proxima Nova"/>
-                <a:ea typeface="Proxima Nova"/>
-                <a:cs typeface="Proxima Nova"/>
-                <a:sym typeface="Proxima Nova"/>
-              </a:rPr>
-              <a:t>все фильтры на листе влияют на все диаграммы на листе</a:t>
-            </a:r>
-          </a:p>
-        </p:txBody>
-      </p:sp>
-      <p:sp>
-        <p:nvSpPr>
-          <p:cNvPr id="6" name="Google Shape;299;p47">
-            <a:extLst>
-              <a:ext uri="{FF2B5EF4-FFF2-40B4-BE49-F238E27FC236}">
-                <a16:creationId xmlns:a16="http://schemas.microsoft.com/office/drawing/2014/main" id="{F4E6273B-5C10-F9D4-01DA-808E2BE4B435}"/>
-              </a:ext>
-            </a:extLst>
-          </p:cNvPr>
-          <p:cNvSpPr txBox="1"/>
-          <p:nvPr/>
-        </p:nvSpPr>
-        <p:spPr>
-          <a:xfrm>
-            <a:off x="5921144" y="2104500"/>
-            <a:ext cx="2758581" cy="293892"/>
-          </a:xfrm>
-          <a:prstGeom prst="rect">
-            <a:avLst/>
-          </a:prstGeom>
-          <a:noFill/>
-          <a:ln>
-            <a:noFill/>
-          </a:ln>
-        </p:spPr>
-        <p:txBody>
-          <a:bodyPr spcFirstLastPara="1" wrap="square" lIns="45725" tIns="45725" rIns="45725" bIns="45725" numCol="1" anchor="t" anchorCtr="0">
-            <a:noAutofit/>
-          </a:bodyPr>
-          <a:lstStyle/>
-          <a:p>
-            <a:pPr marL="152400" lvl="0" algn="l" rtl="0">
-              <a:lnSpc>
-                <a:spcPct val="119000"/>
-              </a:lnSpc>
-              <a:spcBef>
-                <a:spcPts val="0"/>
-              </a:spcBef>
-              <a:spcAft>
-                <a:spcPts val="0"/>
-              </a:spcAft>
-              <a:buClr>
-                <a:srgbClr val="4BD0A0"/>
-              </a:buClr>
-              <a:buSzPts val="1200"/>
-            </a:pPr>
-            <a:r>
-              <a:rPr lang="ru-RU" sz="1100" dirty="0">
-                <a:solidFill>
-                  <a:schemeClr val="dk1"/>
-                </a:solidFill>
-                <a:latin typeface="Proxima Nova"/>
-                <a:ea typeface="Proxima Nova"/>
-                <a:cs typeface="Proxima Nova"/>
-                <a:sym typeface="Proxima Nova"/>
-              </a:rPr>
-              <a:t>Взаимодействие:</a:t>
-            </a:r>
-            <a:endParaRPr sz="1100" dirty="0">
-              <a:solidFill>
-                <a:schemeClr val="dk1"/>
-              </a:solidFill>
-              <a:latin typeface="Proxima Nova"/>
-              <a:ea typeface="Proxima Nova"/>
-              <a:cs typeface="Proxima Nova"/>
-              <a:sym typeface="Proxima Nova"/>
-            </a:endParaRPr>
-          </a:p>
-        </p:txBody>
-      </p:sp>
     </p:spTree>
+    <p:extLst>
+      <p:ext uri="{BB962C8B-B14F-4D97-AF65-F5344CB8AC3E}">
+        <p14:creationId xmlns:p14="http://schemas.microsoft.com/office/powerpoint/2010/main" val="1498354473"/>
+      </p:ext>
+    </p:extLst>
   </p:cSld>
   <p:clrMapOvr>
     <a:masterClrMapping/>
@@ -49999,7 +47539,7 @@
                 <a:cs typeface="Proxima Nova Semibold"/>
                 <a:sym typeface="Proxima Nova Semibold"/>
               </a:rPr>
-              <a:t>Результаты анализа</a:t>
+              <a:t>Структура решения</a:t>
             </a:r>
             <a:endParaRPr sz="2500" dirty="0">
               <a:solidFill>
@@ -50027,8 +47567,8 @@
         </p:nvSpPr>
         <p:spPr>
           <a:xfrm>
-            <a:off x="247925" y="1052186"/>
-            <a:ext cx="5673219" cy="3149999"/>
+            <a:off x="247925" y="676875"/>
+            <a:ext cx="8134075" cy="4104675"/>
           </a:xfrm>
           <a:prstGeom prst="rect">
             <a:avLst/>
@@ -50043,7 +47583,7 @@
             </a:blip>
             <a:srcRect/>
             <a:stretch>
-              <a:fillRect/>
+              <a:fillRect l="5027" r="5027"/>
             </a:stretch>
           </a:blipFill>
           <a:ln>
@@ -50075,449 +47615,10 @@
           </a:p>
         </p:txBody>
       </p:sp>
-      <p:sp>
-        <p:nvSpPr>
-          <p:cNvPr id="3" name="Google Shape;299;p47">
-            <a:extLst>
-              <a:ext uri="{FF2B5EF4-FFF2-40B4-BE49-F238E27FC236}">
-                <a16:creationId xmlns:a16="http://schemas.microsoft.com/office/drawing/2014/main" id="{F9C23164-2979-3DA4-83BD-B772ED7BDF79}"/>
-              </a:ext>
-            </a:extLst>
-          </p:cNvPr>
-          <p:cNvSpPr txBox="1"/>
-          <p:nvPr/>
-        </p:nvSpPr>
-        <p:spPr>
-          <a:xfrm>
-            <a:off x="5921144" y="1235206"/>
-            <a:ext cx="2758581" cy="549753"/>
-          </a:xfrm>
-          <a:prstGeom prst="rect">
-            <a:avLst/>
-          </a:prstGeom>
-          <a:noFill/>
-          <a:ln>
-            <a:noFill/>
-          </a:ln>
-        </p:spPr>
-        <p:txBody>
-          <a:bodyPr spcFirstLastPara="1" wrap="square" lIns="45725" tIns="45725" rIns="45725" bIns="45725" numCol="2" anchor="t" anchorCtr="0">
-            <a:noAutofit/>
-          </a:bodyPr>
-          <a:lstStyle/>
-          <a:p>
-            <a:pPr marL="457200" lvl="0" indent="-304800" algn="l" rtl="0">
-              <a:lnSpc>
-                <a:spcPct val="119000"/>
-              </a:lnSpc>
-              <a:spcBef>
-                <a:spcPts val="0"/>
-              </a:spcBef>
-              <a:spcAft>
-                <a:spcPts val="0"/>
-              </a:spcAft>
-              <a:buClr>
-                <a:srgbClr val="4BD0A0"/>
-              </a:buClr>
-              <a:buSzPts val="1200"/>
-              <a:buFont typeface="Proxima Nova"/>
-              <a:buChar char="●"/>
-            </a:pPr>
-            <a:r>
-              <a:rPr lang="ru-RU" sz="1100" dirty="0">
-                <a:solidFill>
-                  <a:schemeClr val="dk1"/>
-                </a:solidFill>
-                <a:latin typeface="Proxima Nova"/>
-                <a:ea typeface="Proxima Nova"/>
-                <a:cs typeface="Proxima Nova"/>
-                <a:sym typeface="Proxima Nova"/>
-              </a:rPr>
-              <a:t>диаграммы</a:t>
-            </a:r>
-          </a:p>
-          <a:p>
-            <a:pPr marL="457200" lvl="0" indent="-304800" algn="l" rtl="0">
-              <a:lnSpc>
-                <a:spcPct val="119000"/>
-              </a:lnSpc>
-              <a:spcBef>
-                <a:spcPts val="0"/>
-              </a:spcBef>
-              <a:spcAft>
-                <a:spcPts val="0"/>
-              </a:spcAft>
-              <a:buClr>
-                <a:srgbClr val="4BD0A0"/>
-              </a:buClr>
-              <a:buSzPts val="1200"/>
-              <a:buFont typeface="Proxima Nova"/>
-              <a:buChar char="●"/>
-            </a:pPr>
-            <a:r>
-              <a:rPr lang="ru-RU" sz="1100" dirty="0">
-                <a:solidFill>
-                  <a:schemeClr val="dk1"/>
-                </a:solidFill>
-                <a:latin typeface="Proxima Nova"/>
-                <a:ea typeface="Proxima Nova"/>
-                <a:cs typeface="Proxima Nova"/>
-                <a:sym typeface="Proxima Nova"/>
-              </a:rPr>
-              <a:t>фильтры</a:t>
-            </a:r>
-          </a:p>
-          <a:p>
-            <a:pPr marL="457200" lvl="0" indent="-304800" algn="l" rtl="0">
-              <a:lnSpc>
-                <a:spcPct val="119000"/>
-              </a:lnSpc>
-              <a:spcBef>
-                <a:spcPts val="0"/>
-              </a:spcBef>
-              <a:spcAft>
-                <a:spcPts val="0"/>
-              </a:spcAft>
-              <a:buClr>
-                <a:srgbClr val="4BD0A0"/>
-              </a:buClr>
-              <a:buSzPts val="1200"/>
-              <a:buFont typeface="Proxima Nova"/>
-              <a:buChar char="●"/>
-            </a:pPr>
-            <a:r>
-              <a:rPr lang="ru-RU" sz="1100" dirty="0" err="1">
-                <a:solidFill>
-                  <a:schemeClr val="dk1"/>
-                </a:solidFill>
-                <a:latin typeface="Proxima Nova"/>
-                <a:ea typeface="Proxima Nova"/>
-                <a:cs typeface="Proxima Nova"/>
-                <a:sym typeface="Proxima Nova"/>
-              </a:rPr>
-              <a:t>тултипы</a:t>
-            </a:r>
-            <a:endParaRPr lang="ru-RU" sz="1100" dirty="0">
-              <a:solidFill>
-                <a:schemeClr val="dk1"/>
-              </a:solidFill>
-              <a:latin typeface="Proxima Nova"/>
-              <a:ea typeface="Proxima Nova"/>
-              <a:cs typeface="Proxima Nova"/>
-              <a:sym typeface="Proxima Nova"/>
-            </a:endParaRPr>
-          </a:p>
-          <a:p>
-            <a:pPr marL="457200" lvl="0" indent="-304800" algn="l" rtl="0">
-              <a:lnSpc>
-                <a:spcPct val="119000"/>
-              </a:lnSpc>
-              <a:spcBef>
-                <a:spcPts val="0"/>
-              </a:spcBef>
-              <a:spcAft>
-                <a:spcPts val="0"/>
-              </a:spcAft>
-              <a:buClr>
-                <a:srgbClr val="4BD0A0"/>
-              </a:buClr>
-              <a:buSzPts val="1200"/>
-              <a:buFont typeface="Proxima Nova"/>
-              <a:buChar char="●"/>
-            </a:pPr>
-            <a:r>
-              <a:rPr lang="ru-RU" sz="1100" dirty="0">
-                <a:solidFill>
-                  <a:schemeClr val="dk1"/>
-                </a:solidFill>
-                <a:latin typeface="Proxima Nova"/>
-                <a:ea typeface="Proxima Nova"/>
-                <a:cs typeface="Proxima Nova"/>
-                <a:sym typeface="Proxima Nova"/>
-              </a:rPr>
-              <a:t>кнопки</a:t>
-            </a:r>
-            <a:endParaRPr sz="1100" dirty="0">
-              <a:solidFill>
-                <a:schemeClr val="dk1"/>
-              </a:solidFill>
-              <a:latin typeface="Proxima Nova"/>
-              <a:ea typeface="Proxima Nova"/>
-              <a:cs typeface="Proxima Nova"/>
-              <a:sym typeface="Proxima Nova"/>
-            </a:endParaRPr>
-          </a:p>
-        </p:txBody>
-      </p:sp>
-      <p:sp>
-        <p:nvSpPr>
-          <p:cNvPr id="4" name="Google Shape;299;p47">
-            <a:extLst>
-              <a:ext uri="{FF2B5EF4-FFF2-40B4-BE49-F238E27FC236}">
-                <a16:creationId xmlns:a16="http://schemas.microsoft.com/office/drawing/2014/main" id="{B7B29492-9692-53B1-0E82-7047832101F0}"/>
-              </a:ext>
-            </a:extLst>
-          </p:cNvPr>
-          <p:cNvSpPr txBox="1"/>
-          <p:nvPr/>
-        </p:nvSpPr>
-        <p:spPr>
-          <a:xfrm>
-            <a:off x="5921144" y="941314"/>
-            <a:ext cx="2758581" cy="293892"/>
-          </a:xfrm>
-          <a:prstGeom prst="rect">
-            <a:avLst/>
-          </a:prstGeom>
-          <a:noFill/>
-          <a:ln>
-            <a:noFill/>
-          </a:ln>
-        </p:spPr>
-        <p:txBody>
-          <a:bodyPr spcFirstLastPara="1" wrap="square" lIns="45725" tIns="45725" rIns="45725" bIns="45725" numCol="1" anchor="t" anchorCtr="0">
-            <a:noAutofit/>
-          </a:bodyPr>
-          <a:lstStyle/>
-          <a:p>
-            <a:pPr marL="152400" lvl="0" algn="l" rtl="0">
-              <a:lnSpc>
-                <a:spcPct val="119000"/>
-              </a:lnSpc>
-              <a:spcBef>
-                <a:spcPts val="0"/>
-              </a:spcBef>
-              <a:spcAft>
-                <a:spcPts val="0"/>
-              </a:spcAft>
-              <a:buClr>
-                <a:srgbClr val="4BD0A0"/>
-              </a:buClr>
-              <a:buSzPts val="1200"/>
-            </a:pPr>
-            <a:r>
-              <a:rPr lang="ru-RU" sz="1100" dirty="0">
-                <a:solidFill>
-                  <a:schemeClr val="dk1"/>
-                </a:solidFill>
-                <a:latin typeface="Proxima Nova"/>
-                <a:ea typeface="Proxima Nova"/>
-                <a:cs typeface="Proxima Nova"/>
-                <a:sym typeface="Proxima Nova"/>
-              </a:rPr>
-              <a:t>Элементы диаграммы:</a:t>
-            </a:r>
-            <a:endParaRPr sz="1100" dirty="0">
-              <a:solidFill>
-                <a:schemeClr val="dk1"/>
-              </a:solidFill>
-              <a:latin typeface="Proxima Nova"/>
-              <a:ea typeface="Proxima Nova"/>
-              <a:cs typeface="Proxima Nova"/>
-              <a:sym typeface="Proxima Nova"/>
-            </a:endParaRPr>
-          </a:p>
-        </p:txBody>
-      </p:sp>
-      <p:sp>
-        <p:nvSpPr>
-          <p:cNvPr id="5" name="Google Shape;299;p47">
-            <a:extLst>
-              <a:ext uri="{FF2B5EF4-FFF2-40B4-BE49-F238E27FC236}">
-                <a16:creationId xmlns:a16="http://schemas.microsoft.com/office/drawing/2014/main" id="{CDCCF1C4-587B-D19A-B434-00E3E8AA0F17}"/>
-              </a:ext>
-            </a:extLst>
-          </p:cNvPr>
-          <p:cNvSpPr txBox="1"/>
-          <p:nvPr/>
-        </p:nvSpPr>
-        <p:spPr>
-          <a:xfrm>
-            <a:off x="5921144" y="2078851"/>
-            <a:ext cx="2758581" cy="2467970"/>
-          </a:xfrm>
-          <a:prstGeom prst="rect">
-            <a:avLst/>
-          </a:prstGeom>
-          <a:noFill/>
-          <a:ln>
-            <a:noFill/>
-          </a:ln>
-        </p:spPr>
-        <p:txBody>
-          <a:bodyPr spcFirstLastPara="1" wrap="square" lIns="45725" tIns="45725" rIns="45725" bIns="45725" numCol="1" anchor="t" anchorCtr="0">
-            <a:noAutofit/>
-          </a:bodyPr>
-          <a:lstStyle/>
-          <a:p>
-            <a:pPr marL="457200" lvl="0" indent="-304800" algn="l" rtl="0">
-              <a:lnSpc>
-                <a:spcPct val="119000"/>
-              </a:lnSpc>
-              <a:spcBef>
-                <a:spcPts val="0"/>
-              </a:spcBef>
-              <a:spcAft>
-                <a:spcPts val="0"/>
-              </a:spcAft>
-              <a:buClr>
-                <a:srgbClr val="4BD0A0"/>
-              </a:buClr>
-              <a:buSzPts val="1200"/>
-              <a:buFont typeface="Proxima Nova"/>
-              <a:buChar char="●"/>
-            </a:pPr>
-            <a:r>
-              <a:rPr lang="ru-RU" sz="1100" dirty="0">
-                <a:solidFill>
-                  <a:schemeClr val="dk1"/>
-                </a:solidFill>
-                <a:latin typeface="Proxima Nova"/>
-                <a:ea typeface="Proxima Nova"/>
-                <a:cs typeface="Proxima Nova"/>
-                <a:sym typeface="Proxima Nova"/>
-              </a:rPr>
-              <a:t>диаграмма «динамика продаж и прогноз» может быть фильтром для диаграммы «количество и среднее время доставки»</a:t>
-            </a:r>
-          </a:p>
-          <a:p>
-            <a:pPr marL="457200" lvl="0" indent="-304800" algn="l" rtl="0">
-              <a:lnSpc>
-                <a:spcPct val="119000"/>
-              </a:lnSpc>
-              <a:spcBef>
-                <a:spcPts val="0"/>
-              </a:spcBef>
-              <a:spcAft>
-                <a:spcPts val="0"/>
-              </a:spcAft>
-              <a:buClr>
-                <a:srgbClr val="4BD0A0"/>
-              </a:buClr>
-              <a:buSzPts val="1200"/>
-              <a:buFont typeface="Proxima Nova"/>
-              <a:buChar char="●"/>
-            </a:pPr>
-            <a:r>
-              <a:rPr lang="ru-RU" sz="1100" dirty="0">
-                <a:solidFill>
-                  <a:schemeClr val="dk1"/>
-                </a:solidFill>
-                <a:latin typeface="Proxima Nova"/>
-                <a:ea typeface="Proxima Nova"/>
-                <a:cs typeface="Proxima Nova"/>
-                <a:sym typeface="Proxima Nova"/>
-              </a:rPr>
-              <a:t>диаграмма «доля повторных покупок в каждом типе доставки» и диаграмма «количество и среднее время доставки» могут быть фильтрами для всех диаграмм на листе</a:t>
-            </a:r>
-          </a:p>
-          <a:p>
-            <a:pPr marL="457200" lvl="0" indent="-304800" algn="l" rtl="0">
-              <a:lnSpc>
-                <a:spcPct val="119000"/>
-              </a:lnSpc>
-              <a:spcBef>
-                <a:spcPts val="0"/>
-              </a:spcBef>
-              <a:spcAft>
-                <a:spcPts val="0"/>
-              </a:spcAft>
-              <a:buClr>
-                <a:srgbClr val="4BD0A0"/>
-              </a:buClr>
-              <a:buSzPts val="1200"/>
-              <a:buFont typeface="Proxima Nova"/>
-              <a:buChar char="●"/>
-            </a:pPr>
-            <a:r>
-              <a:rPr lang="ru-RU" sz="1100" dirty="0">
-                <a:solidFill>
-                  <a:schemeClr val="dk1"/>
-                </a:solidFill>
-                <a:latin typeface="Proxima Nova"/>
-                <a:ea typeface="Proxima Nova"/>
-                <a:cs typeface="Proxima Nova"/>
-                <a:sym typeface="Proxima Nova"/>
-              </a:rPr>
-              <a:t>все фильтры на листе влияют на все диаграммы на листе</a:t>
-            </a:r>
-          </a:p>
-        </p:txBody>
-      </p:sp>
-      <p:sp>
-        <p:nvSpPr>
-          <p:cNvPr id="6" name="Google Shape;299;p47">
-            <a:extLst>
-              <a:ext uri="{FF2B5EF4-FFF2-40B4-BE49-F238E27FC236}">
-                <a16:creationId xmlns:a16="http://schemas.microsoft.com/office/drawing/2014/main" id="{F4E6273B-5C10-F9D4-01DA-808E2BE4B435}"/>
-              </a:ext>
-            </a:extLst>
-          </p:cNvPr>
-          <p:cNvSpPr txBox="1"/>
-          <p:nvPr/>
-        </p:nvSpPr>
-        <p:spPr>
-          <a:xfrm>
-            <a:off x="5921144" y="1784959"/>
-            <a:ext cx="2758581" cy="293892"/>
-          </a:xfrm>
-          <a:prstGeom prst="rect">
-            <a:avLst/>
-          </a:prstGeom>
-          <a:noFill/>
-          <a:ln>
-            <a:noFill/>
-          </a:ln>
-        </p:spPr>
-        <p:txBody>
-          <a:bodyPr spcFirstLastPara="1" wrap="square" lIns="45725" tIns="45725" rIns="45725" bIns="45725" numCol="1" anchor="t" anchorCtr="0">
-            <a:noAutofit/>
-          </a:bodyPr>
-          <a:lstStyle/>
-          <a:p>
-            <a:pPr marL="152400" lvl="0" algn="l" rtl="0">
-              <a:lnSpc>
-                <a:spcPct val="119000"/>
-              </a:lnSpc>
-              <a:spcBef>
-                <a:spcPts val="0"/>
-              </a:spcBef>
-              <a:spcAft>
-                <a:spcPts val="0"/>
-              </a:spcAft>
-              <a:buClr>
-                <a:srgbClr val="4BD0A0"/>
-              </a:buClr>
-              <a:buSzPts val="1200"/>
-            </a:pPr>
-            <a:r>
-              <a:rPr lang="ru-RU" sz="1100" dirty="0">
-                <a:solidFill>
-                  <a:schemeClr val="dk1"/>
-                </a:solidFill>
-                <a:latin typeface="Proxima Nova"/>
-                <a:ea typeface="Proxima Nova"/>
-                <a:cs typeface="Proxima Nova"/>
-                <a:sym typeface="Proxima Nova"/>
-              </a:rPr>
-              <a:t>Взаимодействие:</a:t>
-            </a:r>
-            <a:endParaRPr sz="1100" dirty="0">
-              <a:solidFill>
-                <a:schemeClr val="dk1"/>
-              </a:solidFill>
-              <a:latin typeface="Proxima Nova"/>
-              <a:ea typeface="Proxima Nova"/>
-              <a:cs typeface="Proxima Nova"/>
-              <a:sym typeface="Proxima Nova"/>
-            </a:endParaRPr>
-          </a:p>
-        </p:txBody>
-      </p:sp>
     </p:spTree>
     <p:extLst>
       <p:ext uri="{BB962C8B-B14F-4D97-AF65-F5344CB8AC3E}">
-        <p14:creationId xmlns:p14="http://schemas.microsoft.com/office/powerpoint/2010/main" val="1077630590"/>
+        <p14:creationId xmlns:p14="http://schemas.microsoft.com/office/powerpoint/2010/main" val="4292890288"/>
       </p:ext>
     </p:extLst>
   </p:cSld>
@@ -50532,7 +47633,7 @@
   <p:cSld>
     <p:spTree>
       <p:nvGrpSpPr>
-        <p:cNvPr id="1" name="Shape 297"/>
+        <p:cNvPr id="1" name="Shape 310"/>
         <p:cNvGrpSpPr/>
         <p:nvPr/>
       </p:nvGrpSpPr>
@@ -50546,7 +47647,7 @@
       </p:grpSpPr>
       <p:sp>
         <p:nvSpPr>
-          <p:cNvPr id="298" name="Google Shape;298;p47"/>
+          <p:cNvPr id="311" name="Google Shape;311;p49"/>
           <p:cNvSpPr txBox="1"/>
           <p:nvPr/>
         </p:nvSpPr>
@@ -50582,7 +47683,7 @@
               <a:buNone/>
             </a:pPr>
             <a:r>
-              <a:rPr lang="ru-RU" sz="2500" dirty="0">
+              <a:rPr lang="ru-RU" sz="2500">
                 <a:solidFill>
                   <a:srgbClr val="4BD0A0"/>
                 </a:solidFill>
@@ -50591,9 +47692,9 @@
                 <a:cs typeface="Proxima Nova Semibold"/>
                 <a:sym typeface="Proxima Nova Semibold"/>
               </a:rPr>
-              <a:t>Результаты анализа</a:t>
+              <a:t>Выводы и рекомендации</a:t>
             </a:r>
-            <a:endParaRPr sz="2500" dirty="0">
+            <a:endParaRPr sz="2500">
               <a:solidFill>
                 <a:srgbClr val="4BD0A0"/>
               </a:solidFill>
@@ -50607,82 +47708,14 @@
       </p:sp>
       <p:sp>
         <p:nvSpPr>
-          <p:cNvPr id="2" name="Прямоугольник 1">
-            <a:extLst>
-              <a:ext uri="{FF2B5EF4-FFF2-40B4-BE49-F238E27FC236}">
-                <a16:creationId xmlns:a16="http://schemas.microsoft.com/office/drawing/2014/main" id="{3DE3DFE9-6ADC-42C5-50D6-093F832F9E2D}"/>
-              </a:ext>
-            </a:extLst>
-          </p:cNvPr>
-          <p:cNvSpPr/>
-          <p:nvPr/>
-        </p:nvSpPr>
-        <p:spPr>
-          <a:xfrm>
-            <a:off x="247925" y="1052186"/>
-            <a:ext cx="5673219" cy="3149999"/>
-          </a:xfrm>
-          <a:prstGeom prst="rect">
-            <a:avLst/>
-          </a:prstGeom>
-          <a:blipFill dpi="0" rotWithShape="1">
-            <a:blip r:embed="rId3">
-              <a:extLst>
-                <a:ext uri="{28A0092B-C50C-407E-A947-70E740481C1C}">
-                  <a14:useLocalDpi xmlns:a14="http://schemas.microsoft.com/office/drawing/2010/main" val="0"/>
-                </a:ext>
-              </a:extLst>
-            </a:blip>
-            <a:srcRect/>
-            <a:stretch>
-              <a:fillRect/>
-            </a:stretch>
-          </a:blipFill>
-          <a:ln>
-            <a:noFill/>
-          </a:ln>
-        </p:spPr>
-        <p:style>
-          <a:lnRef idx="2">
-            <a:schemeClr val="accent1">
-              <a:shade val="15000"/>
-            </a:schemeClr>
-          </a:lnRef>
-          <a:fillRef idx="1">
-            <a:schemeClr val="accent1"/>
-          </a:fillRef>
-          <a:effectRef idx="0">
-            <a:schemeClr val="accent1"/>
-          </a:effectRef>
-          <a:fontRef idx="minor">
-            <a:schemeClr val="lt1"/>
-          </a:fontRef>
-        </p:style>
-        <p:txBody>
-          <a:bodyPr rtlCol="0" anchor="ctr"/>
-          <a:lstStyle/>
-          <a:p>
-            <a:pPr algn="ctr"/>
-            <a:endParaRPr lang="ru-RU"/>
-          </a:p>
-        </p:txBody>
-      </p:sp>
-      <p:sp>
-        <p:nvSpPr>
-          <p:cNvPr id="3" name="Google Shape;299;p47">
-            <a:extLst>
-              <a:ext uri="{FF2B5EF4-FFF2-40B4-BE49-F238E27FC236}">
-                <a16:creationId xmlns:a16="http://schemas.microsoft.com/office/drawing/2014/main" id="{F9C23164-2979-3DA4-83BD-B772ED7BDF79}"/>
-              </a:ext>
-            </a:extLst>
-          </p:cNvPr>
+          <p:cNvPr id="312" name="Google Shape;312;p49"/>
           <p:cNvSpPr txBox="1"/>
           <p:nvPr/>
         </p:nvSpPr>
         <p:spPr>
           <a:xfrm>
-            <a:off x="5921144" y="1235206"/>
-            <a:ext cx="2758581" cy="549753"/>
+            <a:off x="322550" y="1096805"/>
+            <a:ext cx="8498900" cy="2949889"/>
           </a:xfrm>
           <a:prstGeom prst="rect">
             <a:avLst/>
@@ -50700,7 +47733,7 @@
           <a:p>
             <a:pPr marL="457200" lvl="0" indent="-304800" algn="l" rtl="0">
               <a:lnSpc>
-                <a:spcPct val="119000"/>
+                <a:spcPct val="150000"/>
               </a:lnSpc>
               <a:spcBef>
                 <a:spcPts val="0"/>
@@ -50725,13 +47758,13 @@
                 <a:cs typeface="Proxima Nova"/>
                 <a:sym typeface="Proxima Nova"/>
               </a:rPr>
-              <a:t>диаграммы</a:t>
+              <a:t>общая выручка более 2 млн. долларов</a:t>
             </a:r>
           </a:p>
           <a:p>
             <a:pPr marL="457200" lvl="0" indent="-304800" algn="l" rtl="0">
               <a:lnSpc>
-                <a:spcPct val="119000"/>
+                <a:spcPct val="150000"/>
               </a:lnSpc>
               <a:spcBef>
                 <a:spcPts val="0"/>
@@ -50756,53 +47789,13 @@
                 <a:cs typeface="Proxima Nova"/>
                 <a:sym typeface="Proxima Nova"/>
               </a:rPr>
-              <a:t>фильтры</a:t>
+              <a:t>общее количество заказов около 5 тысяч</a:t>
             </a:r>
           </a:p>
           <a:p>
             <a:pPr marL="457200" lvl="0" indent="-304800" algn="l" rtl="0">
               <a:lnSpc>
-                <a:spcPct val="119000"/>
-              </a:lnSpc>
-              <a:spcBef>
-                <a:spcPts val="0"/>
-              </a:spcBef>
-              <a:spcAft>
-                <a:spcPts val="0"/>
-              </a:spcAft>
-              <a:buClr>
-                <a:srgbClr val="4BD0A0"/>
-              </a:buClr>
-              <a:buSzPts val="1200"/>
-              <a:buFont typeface="Proxima Nova"/>
-              <a:buChar char="●"/>
-            </a:pPr>
-            <a:r>
-              <a:rPr lang="ru-RU" sz="1100" dirty="0" err="1">
-                <a:solidFill>
-                  <a:schemeClr val="dk1"/>
-                </a:solidFill>
-                <a:latin typeface="Proxima Nova"/>
-                <a:ea typeface="Proxima Nova"/>
-                <a:cs typeface="Proxima Nova"/>
-                <a:sym typeface="Proxima Nova"/>
-              </a:rPr>
-              <a:t>тултипы</a:t>
-            </a:r>
-            <a:endParaRPr lang="ru-RU" sz="1100" dirty="0">
-              <a:solidFill>
-                <a:schemeClr val="dk1"/>
-              </a:solidFill>
-              <a:latin typeface="Proxima Nova"/>
-              <a:ea typeface="Proxima Nova"/>
-              <a:cs typeface="Proxima Nova"/>
-              <a:sym typeface="Proxima Nova"/>
-            </a:endParaRPr>
-          </a:p>
-          <a:p>
-            <a:pPr marL="457200" lvl="0" indent="-304800" algn="l" rtl="0">
-              <a:lnSpc>
-                <a:spcPct val="119000"/>
+                <a:spcPct val="150000"/>
               </a:lnSpc>
               <a:spcBef>
                 <a:spcPts val="0"/>
@@ -50827,66 +47820,20 @@
                 <a:cs typeface="Proxima Nova"/>
                 <a:sym typeface="Proxima Nova"/>
               </a:rPr>
-              <a:t>кнопки</a:t>
+              <a:t>лидеры по продажам и заказам: штат Калифорния, город Нью-Йорк, сегмент – «</a:t>
             </a:r>
-            <a:endParaRPr sz="1100" dirty="0">
-              <a:solidFill>
-                <a:schemeClr val="dk1"/>
-              </a:solidFill>
-              <a:latin typeface="Proxima Nova"/>
-              <a:ea typeface="Proxima Nova"/>
-              <a:cs typeface="Proxima Nova"/>
-              <a:sym typeface="Proxima Nova"/>
-            </a:endParaRPr>
-          </a:p>
-        </p:txBody>
-      </p:sp>
-      <p:sp>
-        <p:nvSpPr>
-          <p:cNvPr id="4" name="Google Shape;299;p47">
-            <a:extLst>
-              <a:ext uri="{FF2B5EF4-FFF2-40B4-BE49-F238E27FC236}">
-                <a16:creationId xmlns:a16="http://schemas.microsoft.com/office/drawing/2014/main" id="{B7B29492-9692-53B1-0E82-7047832101F0}"/>
-              </a:ext>
-            </a:extLst>
-          </p:cNvPr>
-          <p:cNvSpPr txBox="1"/>
-          <p:nvPr/>
-        </p:nvSpPr>
-        <p:spPr>
-          <a:xfrm>
-            <a:off x="5921144" y="941314"/>
-            <a:ext cx="2758581" cy="293892"/>
-          </a:xfrm>
-          <a:prstGeom prst="rect">
-            <a:avLst/>
-          </a:prstGeom>
-          <a:noFill/>
-          <a:ln>
-            <a:noFill/>
-          </a:ln>
-        </p:spPr>
-        <p:txBody>
-          <a:bodyPr spcFirstLastPara="1" wrap="square" lIns="45725" tIns="45725" rIns="45725" bIns="45725" numCol="1" anchor="t" anchorCtr="0">
-            <a:noAutofit/>
-          </a:bodyPr>
-          <a:lstStyle/>
-          <a:p>
-            <a:pPr marL="152400" lvl="0" algn="l" rtl="0">
-              <a:lnSpc>
-                <a:spcPct val="119000"/>
-              </a:lnSpc>
-              <a:spcBef>
-                <a:spcPts val="0"/>
-              </a:spcBef>
-              <a:spcAft>
-                <a:spcPts val="0"/>
-              </a:spcAft>
-              <a:buClr>
-                <a:srgbClr val="4BD0A0"/>
-              </a:buClr>
-              <a:buSzPts val="1200"/>
-            </a:pPr>
+            <a:r>
+              <a:rPr lang="en-US" sz="1100" dirty="0">
+                <a:solidFill>
+                  <a:schemeClr val="dk1"/>
+                </a:solidFill>
+                <a:latin typeface="Proxima Nova"/>
+                <a:ea typeface="Proxima Nova"/>
+                <a:cs typeface="Proxima Nova"/>
+                <a:sym typeface="Proxima Nova"/>
+              </a:rPr>
+              <a:t>Consumer</a:t>
+            </a:r>
             <a:r>
               <a:rPr lang="ru-RU" sz="1100" dirty="0">
                 <a:solidFill>
@@ -50897,54 +47844,37 @@
                 <a:cs typeface="Proxima Nova"/>
                 <a:sym typeface="Proxima Nova"/>
               </a:rPr>
-              <a:t>Элементы диаграммы:</a:t>
+              <a:t>»</a:t>
             </a:r>
-            <a:endParaRPr sz="1100" dirty="0">
-              <a:solidFill>
-                <a:schemeClr val="dk1"/>
-              </a:solidFill>
-              <a:latin typeface="Proxima Nova"/>
-              <a:ea typeface="Proxima Nova"/>
-              <a:cs typeface="Proxima Nova"/>
-              <a:sym typeface="Proxima Nova"/>
-            </a:endParaRPr>
+            <a:r>
+              <a:rPr lang="en-US" sz="1100" dirty="0">
+                <a:solidFill>
+                  <a:schemeClr val="dk1"/>
+                </a:solidFill>
+                <a:latin typeface="Proxima Nova"/>
+                <a:ea typeface="Proxima Nova"/>
+                <a:cs typeface="Proxima Nova"/>
+                <a:sym typeface="Proxima Nova"/>
+              </a:rPr>
+              <a:t>,</a:t>
+            </a:r>
+            <a:r>
+              <a:rPr lang="ru-RU" sz="1100" dirty="0">
+                <a:solidFill>
+                  <a:schemeClr val="dk1"/>
+                </a:solidFill>
+                <a:latin typeface="Proxima Nova"/>
+                <a:ea typeface="Proxima Nova"/>
+                <a:cs typeface="Proxima Nova"/>
+                <a:sym typeface="Proxima Nova"/>
+              </a:rPr>
+              <a:t> категория – технологии, подкатегория – телефоны</a:t>
+            </a:r>
           </a:p>
-        </p:txBody>
-      </p:sp>
-      <p:sp>
-        <p:nvSpPr>
-          <p:cNvPr id="5" name="Google Shape;299;p47">
-            <a:extLst>
-              <a:ext uri="{FF2B5EF4-FFF2-40B4-BE49-F238E27FC236}">
-                <a16:creationId xmlns:a16="http://schemas.microsoft.com/office/drawing/2014/main" id="{CDCCF1C4-587B-D19A-B434-00E3E8AA0F17}"/>
-              </a:ext>
-            </a:extLst>
-          </p:cNvPr>
-          <p:cNvSpPr txBox="1"/>
-          <p:nvPr/>
-        </p:nvSpPr>
-        <p:spPr>
-          <a:xfrm>
-            <a:off x="5921144" y="2078851"/>
-            <a:ext cx="2758581" cy="1309439"/>
-          </a:xfrm>
-          <a:prstGeom prst="rect">
-            <a:avLst/>
-          </a:prstGeom>
-          <a:noFill/>
-          <a:ln>
-            <a:noFill/>
-          </a:ln>
-        </p:spPr>
-        <p:txBody>
-          <a:bodyPr spcFirstLastPara="1" wrap="square" lIns="45725" tIns="45725" rIns="45725" bIns="45725" numCol="1" anchor="t" anchorCtr="0">
-            <a:noAutofit/>
-          </a:bodyPr>
-          <a:lstStyle/>
           <a:p>
             <a:pPr marL="457200" lvl="0" indent="-304800" algn="l" rtl="0">
               <a:lnSpc>
-                <a:spcPct val="119000"/>
+                <a:spcPct val="150000"/>
               </a:lnSpc>
               <a:spcBef>
                 <a:spcPts val="0"/>
@@ -50969,13 +47899,13 @@
                 <a:cs typeface="Proxima Nova"/>
                 <a:sym typeface="Proxima Nova"/>
               </a:rPr>
-              <a:t>диаграмма «количество клиентов и объем продаж» и диаграмма «продажи по штатам» могут быть фильтром для всех диаграмм</a:t>
+              <a:t>имеют наиболее низкие показатели: штат Северная Дакота, город Миссури, сегмент – домашний офис, категория – офисные принадлежности, подкатегория – крепежи</a:t>
             </a:r>
           </a:p>
           <a:p>
             <a:pPr marL="457200" lvl="0" indent="-304800" algn="l" rtl="0">
               <a:lnSpc>
-                <a:spcPct val="119000"/>
+                <a:spcPct val="150000"/>
               </a:lnSpc>
               <a:spcBef>
                 <a:spcPts val="0"/>
@@ -50996,21 +47926,215 @@
                   <a:schemeClr val="dk1"/>
                 </a:solidFill>
                 <a:latin typeface="Proxima Nova"/>
-                <a:ea typeface="Proxima Nova"/>
-                <a:cs typeface="Proxima Nova"/>
+              </a:rPr>
+              <a:t>средний чек сегмента «C</a:t>
+            </a:r>
+            <a:r>
+              <a:rPr lang="en-US" sz="1100" dirty="0">
+                <a:solidFill>
+                  <a:schemeClr val="dk1"/>
+                </a:solidFill>
+                <a:latin typeface="Proxima Nova"/>
+              </a:rPr>
+              <a:t>orporate</a:t>
+            </a:r>
+            <a:r>
+              <a:rPr lang="ru-RU" sz="1100" dirty="0">
+                <a:solidFill>
+                  <a:schemeClr val="dk1"/>
+                </a:solidFill>
+                <a:latin typeface="Proxima Nova"/>
+              </a:rPr>
+              <a:t>» - 467,77 $, гипотеза неверная</a:t>
+            </a:r>
+          </a:p>
+          <a:p>
+            <a:pPr marL="457200" lvl="0" indent="-304800" algn="l" rtl="0">
+              <a:lnSpc>
+                <a:spcPct val="150000"/>
+              </a:lnSpc>
+              <a:spcBef>
+                <a:spcPts val="0"/>
+              </a:spcBef>
+              <a:spcAft>
+                <a:spcPts val="0"/>
+              </a:spcAft>
+              <a:buClr>
+                <a:srgbClr val="4BD0A0"/>
+              </a:buClr>
+              <a:buSzPts val="1200"/>
+              <a:buFont typeface="Proxima Nova"/>
+              <a:buChar char="●"/>
+            </a:pPr>
+            <a:r>
+              <a:rPr lang="ru-RU" sz="1100" dirty="0">
+                <a:solidFill>
+                  <a:schemeClr val="dk1"/>
+                </a:solidFill>
+                <a:latin typeface="Proxima Nova"/>
                 <a:sym typeface="Proxima Nova"/>
               </a:rPr>
-              <a:t>все фильтры на листе влияют на все диаграммы на листе</a:t>
+              <a:t>заметна положительная динамика роста продаж</a:t>
+            </a:r>
+          </a:p>
+          <a:p>
+            <a:pPr marL="457200" lvl="0" indent="-304800" algn="l" rtl="0">
+              <a:lnSpc>
+                <a:spcPct val="150000"/>
+              </a:lnSpc>
+              <a:spcBef>
+                <a:spcPts val="0"/>
+              </a:spcBef>
+              <a:spcAft>
+                <a:spcPts val="0"/>
+              </a:spcAft>
+              <a:buClr>
+                <a:srgbClr val="4BD0A0"/>
+              </a:buClr>
+              <a:buSzPts val="1200"/>
+              <a:buFont typeface="Proxima Nova"/>
+              <a:buChar char="●"/>
+            </a:pPr>
+            <a:r>
+              <a:rPr lang="ru-RU" sz="1100" dirty="0">
+                <a:solidFill>
+                  <a:schemeClr val="dk1"/>
+                </a:solidFill>
+                <a:latin typeface="Proxima Nova"/>
+                <a:sym typeface="Proxima Nova"/>
+              </a:rPr>
+              <a:t>чаще всего пользуются стандартной доставкой</a:t>
+            </a:r>
+          </a:p>
+          <a:p>
+            <a:pPr marL="457200" lvl="0" indent="-304800" algn="l" rtl="0">
+              <a:lnSpc>
+                <a:spcPct val="150000"/>
+              </a:lnSpc>
+              <a:spcBef>
+                <a:spcPts val="0"/>
+              </a:spcBef>
+              <a:spcAft>
+                <a:spcPts val="0"/>
+              </a:spcAft>
+              <a:buClr>
+                <a:srgbClr val="4BD0A0"/>
+              </a:buClr>
+              <a:buSzPts val="1200"/>
+              <a:buFont typeface="Proxima Nova"/>
+              <a:buChar char="●"/>
+            </a:pPr>
+            <a:r>
+              <a:rPr lang="ru-RU" sz="1100" dirty="0">
+                <a:solidFill>
+                  <a:schemeClr val="dk1"/>
+                </a:solidFill>
+                <a:latin typeface="Proxima Nova"/>
+              </a:rPr>
+              <a:t>доля повторных покупок в каждом типе доставок практически одинаковая – гипотеза неверная </a:t>
+            </a:r>
+          </a:p>
+          <a:p>
+            <a:pPr marL="457200" lvl="0" indent="-304800" algn="l" rtl="0">
+              <a:lnSpc>
+                <a:spcPct val="150000"/>
+              </a:lnSpc>
+              <a:spcBef>
+                <a:spcPts val="0"/>
+              </a:spcBef>
+              <a:spcAft>
+                <a:spcPts val="0"/>
+              </a:spcAft>
+              <a:buClr>
+                <a:srgbClr val="4BD0A0"/>
+              </a:buClr>
+              <a:buSzPts val="1200"/>
+              <a:buFont typeface="Proxima Nova"/>
+              <a:buChar char="●"/>
+            </a:pPr>
+            <a:r>
+              <a:rPr lang="ru-RU" sz="1100" dirty="0">
+                <a:solidFill>
+                  <a:schemeClr val="dk1"/>
+                </a:solidFill>
+                <a:latin typeface="Proxima Nova"/>
+              </a:rPr>
+              <a:t>резкий скачок продаж в 2017 году</a:t>
+            </a:r>
+          </a:p>
+          <a:p>
+            <a:pPr marL="457200" lvl="0" indent="-304800" algn="l" rtl="0">
+              <a:lnSpc>
+                <a:spcPct val="150000"/>
+              </a:lnSpc>
+              <a:spcBef>
+                <a:spcPts val="0"/>
+              </a:spcBef>
+              <a:spcAft>
+                <a:spcPts val="0"/>
+              </a:spcAft>
+              <a:buClr>
+                <a:srgbClr val="4BD0A0"/>
+              </a:buClr>
+              <a:buSzPts val="1200"/>
+              <a:buFont typeface="Proxima Nova"/>
+              <a:buChar char="●"/>
+            </a:pPr>
+            <a:r>
+              <a:rPr lang="ru-RU" sz="1100" dirty="0">
+                <a:solidFill>
+                  <a:schemeClr val="dk1"/>
+                </a:solidFill>
+                <a:latin typeface="Proxima Nova"/>
+              </a:rPr>
+              <a:t>заметно снижение объема продаж в первом квартале каждого года</a:t>
+            </a:r>
+          </a:p>
+          <a:p>
+            <a:pPr marL="457200" lvl="0" indent="-304800" algn="l" rtl="0">
+              <a:lnSpc>
+                <a:spcPct val="150000"/>
+              </a:lnSpc>
+              <a:spcBef>
+                <a:spcPts val="0"/>
+              </a:spcBef>
+              <a:spcAft>
+                <a:spcPts val="0"/>
+              </a:spcAft>
+              <a:buClr>
+                <a:srgbClr val="4BD0A0"/>
+              </a:buClr>
+              <a:buSzPts val="1200"/>
+              <a:buFont typeface="Proxima Nova"/>
+              <a:buChar char="●"/>
+            </a:pPr>
+            <a:r>
+              <a:rPr lang="en-US" sz="1100" dirty="0">
+                <a:solidFill>
+                  <a:schemeClr val="dk1"/>
+                </a:solidFill>
+                <a:latin typeface="Proxima Nova"/>
+              </a:rPr>
+              <a:t>RFM-</a:t>
+            </a:r>
+            <a:r>
+              <a:rPr lang="ru-RU" sz="1100" dirty="0">
+                <a:solidFill>
+                  <a:schemeClr val="dk1"/>
+                </a:solidFill>
+                <a:latin typeface="Proxima Nova"/>
+              </a:rPr>
+              <a:t>анализ: по объему продаж лидирует группа лояльных, по количеству клиентов лидирует группа потерянных, количество новых клиентов год от года падает</a:t>
             </a:r>
           </a:p>
         </p:txBody>
       </p:sp>
       <p:sp>
         <p:nvSpPr>
-          <p:cNvPr id="6" name="Google Shape;299;p47">
+          <p:cNvPr id="2" name="Google Shape;312;p49">
             <a:extLst>
               <a:ext uri="{FF2B5EF4-FFF2-40B4-BE49-F238E27FC236}">
-                <a16:creationId xmlns:a16="http://schemas.microsoft.com/office/drawing/2014/main" id="{F4E6273B-5C10-F9D4-01DA-808E2BE4B435}"/>
+                <a16:creationId xmlns:a16="http://schemas.microsoft.com/office/drawing/2014/main" id="{0199CA67-09FE-DCB3-780A-B01BA1D99E4D}"/>
               </a:ext>
             </a:extLst>
           </p:cNvPr>
@@ -51019,8 +48143,8 @@
         </p:nvSpPr>
         <p:spPr>
           <a:xfrm>
-            <a:off x="5921144" y="1784959"/>
-            <a:ext cx="2758581" cy="293892"/>
+            <a:off x="322550" y="746555"/>
+            <a:ext cx="7017600" cy="350250"/>
           </a:xfrm>
           <a:prstGeom prst="rect">
             <a:avLst/>
@@ -51037,9 +48161,6 @@
           <a:lstStyle/>
           <a:p>
             <a:pPr marL="152400" lvl="0" algn="l" rtl="0">
-              <a:lnSpc>
-                <a:spcPct val="119000"/>
-              </a:lnSpc>
               <a:spcBef>
                 <a:spcPts val="0"/>
               </a:spcBef>
@@ -51061,26 +48182,18 @@
                 <a:cs typeface="Proxima Nova"/>
                 <a:sym typeface="Proxima Nova"/>
               </a:rPr>
-              <a:t>Взаимодействие:</a:t>
+              <a:t>Выводы:</a:t>
             </a:r>
-            <a:endParaRPr sz="1100" dirty="0">
+            <a:endParaRPr lang="ru-RU" sz="1100" dirty="0">
               <a:solidFill>
                 <a:schemeClr val="dk1"/>
               </a:solidFill>
               <a:latin typeface="Proxima Nova"/>
-              <a:ea typeface="Proxima Nova"/>
-              <a:cs typeface="Proxima Nova"/>
-              <a:sym typeface="Proxima Nova"/>
             </a:endParaRPr>
           </a:p>
         </p:txBody>
       </p:sp>
     </p:spTree>
-    <p:extLst>
-      <p:ext uri="{BB962C8B-B14F-4D97-AF65-F5344CB8AC3E}">
-        <p14:creationId xmlns:p14="http://schemas.microsoft.com/office/powerpoint/2010/main" val="4176955689"/>
-      </p:ext>
-    </p:extLst>
   </p:cSld>
   <p:clrMapOvr>
     <a:masterClrMapping/>
@@ -51932,287 +49045,6 @@
 </file>
 
 <file path=ppt/theme/theme4.xml><?xml version="1.0" encoding="utf-8"?>
-<a:theme xmlns:a="http://schemas.openxmlformats.org/drawingml/2006/main" name="Office Theme">
-  <a:themeElements>
-    <a:clrScheme name="Office">
-      <a:dk1>
-        <a:srgbClr val="000000"/>
-      </a:dk1>
-      <a:lt1>
-        <a:srgbClr val="FFFFFF"/>
-      </a:lt1>
-      <a:dk2>
-        <a:srgbClr val="1F497D"/>
-      </a:dk2>
-      <a:lt2>
-        <a:srgbClr val="EEECE1"/>
-      </a:lt2>
-      <a:accent1>
-        <a:srgbClr val="4F81BD"/>
-      </a:accent1>
-      <a:accent2>
-        <a:srgbClr val="C0504D"/>
-      </a:accent2>
-      <a:accent3>
-        <a:srgbClr val="9BBB59"/>
-      </a:accent3>
-      <a:accent4>
-        <a:srgbClr val="8064A2"/>
-      </a:accent4>
-      <a:accent5>
-        <a:srgbClr val="4BACC6"/>
-      </a:accent5>
-      <a:accent6>
-        <a:srgbClr val="F79646"/>
-      </a:accent6>
-      <a:hlink>
-        <a:srgbClr val="0000FF"/>
-      </a:hlink>
-      <a:folHlink>
-        <a:srgbClr val="800080"/>
-      </a:folHlink>
-    </a:clrScheme>
-    <a:fontScheme name="Office">
-      <a:majorFont>
-        <a:latin typeface="Arial"/>
-        <a:ea typeface=""/>
-        <a:cs typeface=""/>
-        <a:font script="Jpan" typeface="ＭＳ Ｐゴシック"/>
-        <a:font script="Hang" typeface="맑은 고딕"/>
-        <a:font script="Hans" typeface="宋体"/>
-        <a:font script="Hant" typeface="新細明體"/>
-        <a:font script="Arab" typeface="Times New Roman"/>
-        <a:font script="Hebr" typeface="Times New Roman"/>
-        <a:font script="Thai" typeface="Angsana New"/>
-        <a:font script="Ethi" typeface="Nyala"/>
-        <a:font script="Beng" typeface="Vrinda"/>
-        <a:font script="Gujr" typeface="Shruti"/>
-        <a:font script="Khmr" typeface="MoolBoran"/>
-        <a:font script="Knda" typeface="Tunga"/>
-        <a:font script="Guru" typeface="Raavi"/>
-        <a:font script="Cans" typeface="Euphemia"/>
-        <a:font script="Cher" typeface="Plantagenet Cherokee"/>
-        <a:font script="Yiii" typeface="Microsoft Yi Baiti"/>
-        <a:font script="Tibt" typeface="Microsoft Himalaya"/>
-        <a:font script="Thaa" typeface="MV Boli"/>
-        <a:font script="Deva" typeface="Mangal"/>
-        <a:font script="Telu" typeface="Gautami"/>
-        <a:font script="Taml" typeface="Latha"/>
-        <a:font script="Syrc" typeface="Estrangelo Edessa"/>
-        <a:font script="Orya" typeface="Kalinga"/>
-        <a:font script="Mlym" typeface="Kartika"/>
-        <a:font script="Laoo" typeface="DokChampa"/>
-        <a:font script="Sinh" typeface="Iskoola Pota"/>
-        <a:font script="Mong" typeface="Mongolian Baiti"/>
-        <a:font script="Viet" typeface="Times New Roman"/>
-        <a:font script="Uigh" typeface="Microsoft Uighur"/>
-        <a:font script="Geor" typeface="Sylfaen"/>
-      </a:majorFont>
-      <a:minorFont>
-        <a:latin typeface="Arial"/>
-        <a:ea typeface=""/>
-        <a:cs typeface=""/>
-        <a:font script="Jpan" typeface="ＭＳ Ｐゴシック"/>
-        <a:font script="Hang" typeface="맑은 고딕"/>
-        <a:font script="Hans" typeface="宋体"/>
-        <a:font script="Hant" typeface="新細明體"/>
-        <a:font script="Arab" typeface="Arial"/>
-        <a:font script="Hebr" typeface="Arial"/>
-        <a:font script="Thai" typeface="Cordia New"/>
-        <a:font script="Ethi" typeface="Nyala"/>
-        <a:font script="Beng" typeface="Vrinda"/>
-        <a:font script="Gujr" typeface="Shruti"/>
-        <a:font script="Khmr" typeface="DaunPenh"/>
-        <a:font script="Knda" typeface="Tunga"/>
-        <a:font script="Guru" typeface="Raavi"/>
-        <a:font script="Cans" typeface="Euphemia"/>
-        <a:font script="Cher" typeface="Plantagenet Cherokee"/>
-        <a:font script="Yiii" typeface="Microsoft Yi Baiti"/>
-        <a:font script="Tibt" typeface="Microsoft Himalaya"/>
-        <a:font script="Thaa" typeface="MV Boli"/>
-        <a:font script="Deva" typeface="Mangal"/>
-        <a:font script="Telu" typeface="Gautami"/>
-        <a:font script="Taml" typeface="Latha"/>
-        <a:font script="Syrc" typeface="Estrangelo Edessa"/>
-        <a:font script="Orya" typeface="Kalinga"/>
-        <a:font script="Mlym" typeface="Kartika"/>
-        <a:font script="Laoo" typeface="DokChampa"/>
-        <a:font script="Sinh" typeface="Iskoola Pota"/>
-        <a:font script="Mong" typeface="Mongolian Baiti"/>
-        <a:font script="Viet" typeface="Arial"/>
-        <a:font script="Uigh" typeface="Microsoft Uighur"/>
-        <a:font script="Geor" typeface="Sylfaen"/>
-      </a:minorFont>
-    </a:fontScheme>
-    <a:fmtScheme name="Office">
-      <a:fillStyleLst>
-        <a:solidFill>
-          <a:schemeClr val="phClr"/>
-        </a:solidFill>
-        <a:gradFill rotWithShape="1">
-          <a:gsLst>
-            <a:gs pos="0">
-              <a:schemeClr val="phClr">
-                <a:tint val="50000"/>
-                <a:satMod val="300000"/>
-              </a:schemeClr>
-            </a:gs>
-            <a:gs pos="35000">
-              <a:schemeClr val="phClr">
-                <a:tint val="37000"/>
-                <a:satMod val="300000"/>
-              </a:schemeClr>
-            </a:gs>
-            <a:gs pos="100000">
-              <a:schemeClr val="phClr">
-                <a:tint val="15000"/>
-                <a:satMod val="350000"/>
-              </a:schemeClr>
-            </a:gs>
-          </a:gsLst>
-          <a:lin ang="16200000" scaled="1"/>
-        </a:gradFill>
-        <a:gradFill rotWithShape="1">
-          <a:gsLst>
-            <a:gs pos="0">
-              <a:schemeClr val="phClr">
-                <a:tint val="100000"/>
-                <a:shade val="100000"/>
-                <a:satMod val="130000"/>
-              </a:schemeClr>
-            </a:gs>
-            <a:gs pos="100000">
-              <a:schemeClr val="phClr">
-                <a:tint val="50000"/>
-                <a:shade val="100000"/>
-                <a:satMod val="350000"/>
-              </a:schemeClr>
-            </a:gs>
-          </a:gsLst>
-          <a:lin ang="16200000" scaled="0"/>
-        </a:gradFill>
-      </a:fillStyleLst>
-      <a:lnStyleLst>
-        <a:ln w="9525" cap="flat" cmpd="sng" algn="ctr">
-          <a:solidFill>
-            <a:schemeClr val="phClr">
-              <a:shade val="95000"/>
-              <a:satMod val="105000"/>
-            </a:schemeClr>
-          </a:solidFill>
-          <a:prstDash val="solid"/>
-        </a:ln>
-        <a:ln w="25400" cap="flat" cmpd="sng" algn="ctr">
-          <a:solidFill>
-            <a:schemeClr val="phClr"/>
-          </a:solidFill>
-          <a:prstDash val="solid"/>
-        </a:ln>
-        <a:ln w="38100" cap="flat" cmpd="sng" algn="ctr">
-          <a:solidFill>
-            <a:schemeClr val="phClr"/>
-          </a:solidFill>
-          <a:prstDash val="solid"/>
-        </a:ln>
-      </a:lnStyleLst>
-      <a:effectStyleLst>
-        <a:effectStyle>
-          <a:effectLst>
-            <a:outerShdw blurRad="40000" dist="20000" dir="5400000" rotWithShape="0">
-              <a:srgbClr val="000000">
-                <a:alpha val="38000"/>
-              </a:srgbClr>
-            </a:outerShdw>
-          </a:effectLst>
-        </a:effectStyle>
-        <a:effectStyle>
-          <a:effectLst>
-            <a:outerShdw blurRad="40000" dist="23000" dir="5400000" rotWithShape="0">
-              <a:srgbClr val="000000">
-                <a:alpha val="35000"/>
-              </a:srgbClr>
-            </a:outerShdw>
-          </a:effectLst>
-        </a:effectStyle>
-        <a:effectStyle>
-          <a:effectLst>
-            <a:outerShdw blurRad="40000" dist="23000" dir="5400000" rotWithShape="0">
-              <a:srgbClr val="000000">
-                <a:alpha val="35000"/>
-              </a:srgbClr>
-            </a:outerShdw>
-          </a:effectLst>
-          <a:scene3d>
-            <a:camera prst="orthographicFront">
-              <a:rot lat="0" lon="0" rev="0"/>
-            </a:camera>
-            <a:lightRig rig="threePt" dir="t">
-              <a:rot lat="0" lon="0" rev="1200000"/>
-            </a:lightRig>
-          </a:scene3d>
-          <a:sp3d>
-            <a:bevelT w="63500" h="25400"/>
-          </a:sp3d>
-        </a:effectStyle>
-      </a:effectStyleLst>
-      <a:bgFillStyleLst>
-        <a:solidFill>
-          <a:schemeClr val="phClr"/>
-        </a:solidFill>
-        <a:gradFill rotWithShape="1">
-          <a:gsLst>
-            <a:gs pos="0">
-              <a:schemeClr val="phClr">
-                <a:tint val="40000"/>
-                <a:satMod val="350000"/>
-              </a:schemeClr>
-            </a:gs>
-            <a:gs pos="40000">
-              <a:schemeClr val="phClr">
-                <a:tint val="45000"/>
-                <a:shade val="99000"/>
-                <a:satMod val="350000"/>
-              </a:schemeClr>
-            </a:gs>
-            <a:gs pos="100000">
-              <a:schemeClr val="phClr">
-                <a:shade val="20000"/>
-                <a:satMod val="255000"/>
-              </a:schemeClr>
-            </a:gs>
-          </a:gsLst>
-          <a:path path="circle">
-            <a:fillToRect l="50000" t="-80000" r="50000" b="180000"/>
-          </a:path>
-        </a:gradFill>
-        <a:gradFill rotWithShape="1">
-          <a:gsLst>
-            <a:gs pos="0">
-              <a:schemeClr val="phClr">
-                <a:tint val="80000"/>
-                <a:satMod val="300000"/>
-              </a:schemeClr>
-            </a:gs>
-            <a:gs pos="100000">
-              <a:schemeClr val="phClr">
-                <a:shade val="30000"/>
-                <a:satMod val="200000"/>
-              </a:schemeClr>
-            </a:gs>
-          </a:gsLst>
-          <a:path path="circle">
-            <a:fillToRect l="50000" t="50000" r="50000" b="50000"/>
-          </a:path>
-        </a:gradFill>
-      </a:bgFillStyleLst>
-    </a:fmtScheme>
-  </a:themeElements>
-  <a:objectDefaults/>
-  <a:extraClrSchemeLst/>
-</a:theme>
-</file>
-
-<file path=ppt/theme/theme5.xml><?xml version="1.0" encoding="utf-8"?>
 <a:theme xmlns:a="http://schemas.openxmlformats.org/drawingml/2006/main" name="Simple Light">
   <a:themeElements>
     <a:clrScheme name="Simple Light">
